--- a/RAG_Explained_2_Slides.pptx
+++ b/RAG_Explained_2_Slides.pptx
@@ -1,14 +1,14 @@
 
 <file path=ppt/presentation.xml><?xml version="1.0" encoding="utf-8"?>
-<p:presentation xmlns:a="http://schemas.openxmlformats.org/drawingml/2006/main" xmlns:r="http://schemas.openxmlformats.org/officeDocument/2006/relationships" xmlns:p="http://schemas.openxmlformats.org/presentationml/2006/main" autoCompressPictures="0">
+<p:presentation xmlns:a="http://schemas.openxmlformats.org/drawingml/2006/main" xmlns:r="http://schemas.openxmlformats.org/officeDocument/2006/relationships" xmlns:p="http://schemas.openxmlformats.org/presentationml/2006/main" saveSubsetFonts="1" autoCompressPictures="0">
   <p:sldMasterIdLst>
     <p:sldMasterId id="2147483648" r:id="rId1"/>
   </p:sldMasterIdLst>
   <p:sldIdLst>
-    <p:sldId id="256" r:id="rId3"/>
-    <p:sldId id="257" r:id="rId4"/>
+    <p:sldId id="256" r:id="rId7"/>
+    <p:sldId id="257" r:id="rId8"/>
   </p:sldIdLst>
-  <p:sldSz cx="12191365" cy="6858000" type="screen4x3"/>
+  <p:sldSz cx="12191695" cy="6858000" type="screen4x3"/>
   <p:notesSz cx="6858000" cy="9144000"/>
   <p:defaultTextStyle>
     <a:defPPr>
@@ -105,22 +105,6 @@
       </a:defRPr>
     </a:lvl9pPr>
   </p:defaultTextStyle>
-  <p:extLst>
-    <p:ext uri="{EFAFB233-063F-42B5-8137-9DF3F51BA10A}">
-      <p15:sldGuideLst xmlns:p15="http://schemas.microsoft.com/office/powerpoint/2012/main">
-        <p15:guide id="1" orient="horz" pos="2131" userDrawn="1">
-          <p15:clr>
-            <a:srgbClr val="A4A3A4"/>
-          </p15:clr>
-        </p15:guide>
-        <p15:guide id="2" pos="2880" userDrawn="1">
-          <p15:clr>
-            <a:srgbClr val="A4A3A4"/>
-          </p15:clr>
-        </p15:guide>
-      </p15:sldGuideLst>
-    </p:ext>
-  </p:extLst>
 </p:presentation>
 </file>
 
@@ -305,6 +289,7 @@
           <a:p>
             <a:fld id="{5BCAD085-E8A6-8845-BD4E-CB4CCA059FC4}" type="datetimeFigureOut">
               <a:rPr lang="en-US" smtClean="0"/>
+              <a:t>1/27/13</a:t>
             </a:fld>
             <a:endParaRPr lang="en-US"/>
           </a:p>
@@ -346,12 +331,18 @@
           <a:p>
             <a:fld id="{C1FF6DA9-008F-8B48-92A6-B652298478BF}" type="slidenum">
               <a:rPr lang="en-US" smtClean="0"/>
+              <a:t>‹#›</a:t>
             </a:fld>
             <a:endParaRPr lang="en-US"/>
           </a:p>
         </p:txBody>
       </p:sp>
     </p:spTree>
+    <p:extLst>
+      <p:ext uri="{BB962C8B-B14F-4D97-AF65-F5344CB8AC3E}">
+        <p14:creationId xmlns:p14="http://schemas.microsoft.com/office/powerpoint/2010/main" val="3168075583"/>
+      </p:ext>
+    </p:extLst>
   </p:cSld>
   <p:clrMapOvr>
     <a:masterClrMapping/>
@@ -419,7 +410,6 @@
               <a:rPr lang="en-US" smtClean="0"/>
               <a:t>Click to edit Master text styles</a:t>
             </a:r>
-            <a:endParaRPr lang="en-US" smtClean="0"/>
           </a:p>
           <a:p>
             <a:pPr lvl="1"/>
@@ -427,7 +417,6 @@
               <a:rPr lang="en-US" smtClean="0"/>
               <a:t>Second level</a:t>
             </a:r>
-            <a:endParaRPr lang="en-US" smtClean="0"/>
           </a:p>
           <a:p>
             <a:pPr lvl="2"/>
@@ -435,7 +424,6 @@
               <a:rPr lang="en-US" smtClean="0"/>
               <a:t>Third level</a:t>
             </a:r>
-            <a:endParaRPr lang="en-US" smtClean="0"/>
           </a:p>
           <a:p>
             <a:pPr lvl="3"/>
@@ -443,7 +431,6 @@
               <a:rPr lang="en-US" smtClean="0"/>
               <a:t>Fourth level</a:t>
             </a:r>
-            <a:endParaRPr lang="en-US" smtClean="0"/>
           </a:p>
           <a:p>
             <a:pPr lvl="4"/>
@@ -472,6 +459,7 @@
           <a:p>
             <a:fld id="{5BCAD085-E8A6-8845-BD4E-CB4CCA059FC4}" type="datetimeFigureOut">
               <a:rPr lang="en-US" smtClean="0"/>
+              <a:t>1/27/13</a:t>
             </a:fld>
             <a:endParaRPr lang="en-US"/>
           </a:p>
@@ -513,12 +501,18 @@
           <a:p>
             <a:fld id="{C1FF6DA9-008F-8B48-92A6-B652298478BF}" type="slidenum">
               <a:rPr lang="en-US" smtClean="0"/>
+              <a:t>‹#›</a:t>
             </a:fld>
             <a:endParaRPr lang="en-US"/>
           </a:p>
         </p:txBody>
       </p:sp>
     </p:spTree>
+    <p:extLst>
+      <p:ext uri="{BB962C8B-B14F-4D97-AF65-F5344CB8AC3E}">
+        <p14:creationId xmlns:p14="http://schemas.microsoft.com/office/powerpoint/2010/main" val="2910927964"/>
+      </p:ext>
+    </p:extLst>
   </p:cSld>
   <p:clrMapOvr>
     <a:masterClrMapping/>
@@ -596,7 +590,6 @@
               <a:rPr lang="en-US" smtClean="0"/>
               <a:t>Click to edit Master text styles</a:t>
             </a:r>
-            <a:endParaRPr lang="en-US" smtClean="0"/>
           </a:p>
           <a:p>
             <a:pPr lvl="1"/>
@@ -604,7 +597,6 @@
               <a:rPr lang="en-US" smtClean="0"/>
               <a:t>Second level</a:t>
             </a:r>
-            <a:endParaRPr lang="en-US" smtClean="0"/>
           </a:p>
           <a:p>
             <a:pPr lvl="2"/>
@@ -612,7 +604,6 @@
               <a:rPr lang="en-US" smtClean="0"/>
               <a:t>Third level</a:t>
             </a:r>
-            <a:endParaRPr lang="en-US" smtClean="0"/>
           </a:p>
           <a:p>
             <a:pPr lvl="3"/>
@@ -620,7 +611,6 @@
               <a:rPr lang="en-US" smtClean="0"/>
               <a:t>Fourth level</a:t>
             </a:r>
-            <a:endParaRPr lang="en-US" smtClean="0"/>
           </a:p>
           <a:p>
             <a:pPr lvl="4"/>
@@ -649,6 +639,7 @@
           <a:p>
             <a:fld id="{5BCAD085-E8A6-8845-BD4E-CB4CCA059FC4}" type="datetimeFigureOut">
               <a:rPr lang="en-US" smtClean="0"/>
+              <a:t>1/27/13</a:t>
             </a:fld>
             <a:endParaRPr lang="en-US"/>
           </a:p>
@@ -690,12 +681,18 @@
           <a:p>
             <a:fld id="{C1FF6DA9-008F-8B48-92A6-B652298478BF}" type="slidenum">
               <a:rPr lang="en-US" smtClean="0"/>
+              <a:t>‹#›</a:t>
             </a:fld>
             <a:endParaRPr lang="en-US"/>
           </a:p>
         </p:txBody>
       </p:sp>
     </p:spTree>
+    <p:extLst>
+      <p:ext uri="{BB962C8B-B14F-4D97-AF65-F5344CB8AC3E}">
+        <p14:creationId xmlns:p14="http://schemas.microsoft.com/office/powerpoint/2010/main" val="3612223792"/>
+      </p:ext>
+    </p:extLst>
   </p:cSld>
   <p:clrMapOvr>
     <a:masterClrMapping/>
@@ -763,7 +760,6 @@
               <a:rPr lang="en-US" smtClean="0"/>
               <a:t>Click to edit Master text styles</a:t>
             </a:r>
-            <a:endParaRPr lang="en-US" smtClean="0"/>
           </a:p>
           <a:p>
             <a:pPr lvl="1"/>
@@ -771,7 +767,6 @@
               <a:rPr lang="en-US" smtClean="0"/>
               <a:t>Second level</a:t>
             </a:r>
-            <a:endParaRPr lang="en-US" smtClean="0"/>
           </a:p>
           <a:p>
             <a:pPr lvl="2"/>
@@ -779,7 +774,6 @@
               <a:rPr lang="en-US" smtClean="0"/>
               <a:t>Third level</a:t>
             </a:r>
-            <a:endParaRPr lang="en-US" smtClean="0"/>
           </a:p>
           <a:p>
             <a:pPr lvl="3"/>
@@ -787,7 +781,6 @@
               <a:rPr lang="en-US" smtClean="0"/>
               <a:t>Fourth level</a:t>
             </a:r>
-            <a:endParaRPr lang="en-US" smtClean="0"/>
           </a:p>
           <a:p>
             <a:pPr lvl="4"/>
@@ -816,6 +809,7 @@
           <a:p>
             <a:fld id="{5BCAD085-E8A6-8845-BD4E-CB4CCA059FC4}" type="datetimeFigureOut">
               <a:rPr lang="en-US" smtClean="0"/>
+              <a:t>1/27/13</a:t>
             </a:fld>
             <a:endParaRPr lang="en-US"/>
           </a:p>
@@ -857,12 +851,18 @@
           <a:p>
             <a:fld id="{C1FF6DA9-008F-8B48-92A6-B652298478BF}" type="slidenum">
               <a:rPr lang="en-US" smtClean="0"/>
+              <a:t>‹#›</a:t>
             </a:fld>
             <a:endParaRPr lang="en-US"/>
           </a:p>
         </p:txBody>
       </p:sp>
     </p:spTree>
+    <p:extLst>
+      <p:ext uri="{BB962C8B-B14F-4D97-AF65-F5344CB8AC3E}">
+        <p14:creationId xmlns:p14="http://schemas.microsoft.com/office/powerpoint/2010/main" val="2614314258"/>
+      </p:ext>
+    </p:extLst>
   </p:cSld>
   <p:clrMapOvr>
     <a:masterClrMapping/>
@@ -1035,7 +1035,6 @@
               <a:rPr lang="en-US" smtClean="0"/>
               <a:t>Click to edit Master text styles</a:t>
             </a:r>
-            <a:endParaRPr lang="en-US" smtClean="0"/>
           </a:p>
         </p:txBody>
       </p:sp>
@@ -1056,6 +1055,7 @@
           <a:p>
             <a:fld id="{5BCAD085-E8A6-8845-BD4E-CB4CCA059FC4}" type="datetimeFigureOut">
               <a:rPr lang="en-US" smtClean="0"/>
+              <a:t>1/27/13</a:t>
             </a:fld>
             <a:endParaRPr lang="en-US"/>
           </a:p>
@@ -1097,12 +1097,18 @@
           <a:p>
             <a:fld id="{C1FF6DA9-008F-8B48-92A6-B652298478BF}" type="slidenum">
               <a:rPr lang="en-US" smtClean="0"/>
+              <a:t>‹#›</a:t>
             </a:fld>
             <a:endParaRPr lang="en-US"/>
           </a:p>
         </p:txBody>
       </p:sp>
     </p:spTree>
+    <p:extLst>
+      <p:ext uri="{BB962C8B-B14F-4D97-AF65-F5344CB8AC3E}">
+        <p14:creationId xmlns:p14="http://schemas.microsoft.com/office/powerpoint/2010/main" val="960648375"/>
+      </p:ext>
+    </p:extLst>
   </p:cSld>
   <p:clrMapOvr>
     <a:masterClrMapping/>
@@ -1203,7 +1209,6 @@
               <a:rPr lang="en-US" smtClean="0"/>
               <a:t>Click to edit Master text styles</a:t>
             </a:r>
-            <a:endParaRPr lang="en-US" smtClean="0"/>
           </a:p>
           <a:p>
             <a:pPr lvl="1"/>
@@ -1211,7 +1216,6 @@
               <a:rPr lang="en-US" smtClean="0"/>
               <a:t>Second level</a:t>
             </a:r>
-            <a:endParaRPr lang="en-US" smtClean="0"/>
           </a:p>
           <a:p>
             <a:pPr lvl="2"/>
@@ -1219,7 +1223,6 @@
               <a:rPr lang="en-US" smtClean="0"/>
               <a:t>Third level</a:t>
             </a:r>
-            <a:endParaRPr lang="en-US" smtClean="0"/>
           </a:p>
           <a:p>
             <a:pPr lvl="3"/>
@@ -1227,7 +1230,6 @@
               <a:rPr lang="en-US" smtClean="0"/>
               <a:t>Fourth level</a:t>
             </a:r>
-            <a:endParaRPr lang="en-US" smtClean="0"/>
           </a:p>
           <a:p>
             <a:pPr lvl="4"/>
@@ -1292,7 +1294,6 @@
               <a:rPr lang="en-US" smtClean="0"/>
               <a:t>Click to edit Master text styles</a:t>
             </a:r>
-            <a:endParaRPr lang="en-US" smtClean="0"/>
           </a:p>
           <a:p>
             <a:pPr lvl="1"/>
@@ -1300,7 +1301,6 @@
               <a:rPr lang="en-US" smtClean="0"/>
               <a:t>Second level</a:t>
             </a:r>
-            <a:endParaRPr lang="en-US" smtClean="0"/>
           </a:p>
           <a:p>
             <a:pPr lvl="2"/>
@@ -1308,7 +1308,6 @@
               <a:rPr lang="en-US" smtClean="0"/>
               <a:t>Third level</a:t>
             </a:r>
-            <a:endParaRPr lang="en-US" smtClean="0"/>
           </a:p>
           <a:p>
             <a:pPr lvl="3"/>
@@ -1316,7 +1315,6 @@
               <a:rPr lang="en-US" smtClean="0"/>
               <a:t>Fourth level</a:t>
             </a:r>
-            <a:endParaRPr lang="en-US" smtClean="0"/>
           </a:p>
           <a:p>
             <a:pPr lvl="4"/>
@@ -1345,6 +1343,7 @@
           <a:p>
             <a:fld id="{5BCAD085-E8A6-8845-BD4E-CB4CCA059FC4}" type="datetimeFigureOut">
               <a:rPr lang="en-US" smtClean="0"/>
+              <a:t>1/27/13</a:t>
             </a:fld>
             <a:endParaRPr lang="en-US"/>
           </a:p>
@@ -1386,12 +1385,18 @@
           <a:p>
             <a:fld id="{C1FF6DA9-008F-8B48-92A6-B652298478BF}" type="slidenum">
               <a:rPr lang="en-US" smtClean="0"/>
+              <a:t>‹#›</a:t>
             </a:fld>
             <a:endParaRPr lang="en-US"/>
           </a:p>
         </p:txBody>
       </p:sp>
     </p:spTree>
+    <p:extLst>
+      <p:ext uri="{BB962C8B-B14F-4D97-AF65-F5344CB8AC3E}">
+        <p14:creationId xmlns:p14="http://schemas.microsoft.com/office/powerpoint/2010/main" val="2782244947"/>
+      </p:ext>
+    </p:extLst>
   </p:cSld>
   <p:clrMapOvr>
     <a:masterClrMapping/>
@@ -1505,7 +1510,6 @@
               <a:rPr lang="en-US" smtClean="0"/>
               <a:t>Click to edit Master text styles</a:t>
             </a:r>
-            <a:endParaRPr lang="en-US" smtClean="0"/>
           </a:p>
         </p:txBody>
       </p:sp>
@@ -1562,7 +1566,6 @@
               <a:rPr lang="en-US" smtClean="0"/>
               <a:t>Click to edit Master text styles</a:t>
             </a:r>
-            <a:endParaRPr lang="en-US" smtClean="0"/>
           </a:p>
           <a:p>
             <a:pPr lvl="1"/>
@@ -1570,7 +1573,6 @@
               <a:rPr lang="en-US" smtClean="0"/>
               <a:t>Second level</a:t>
             </a:r>
-            <a:endParaRPr lang="en-US" smtClean="0"/>
           </a:p>
           <a:p>
             <a:pPr lvl="2"/>
@@ -1578,7 +1580,6 @@
               <a:rPr lang="en-US" smtClean="0"/>
               <a:t>Third level</a:t>
             </a:r>
-            <a:endParaRPr lang="en-US" smtClean="0"/>
           </a:p>
           <a:p>
             <a:pPr lvl="3"/>
@@ -1586,7 +1587,6 @@
               <a:rPr lang="en-US" smtClean="0"/>
               <a:t>Fourth level</a:t>
             </a:r>
-            <a:endParaRPr lang="en-US" smtClean="0"/>
           </a:p>
           <a:p>
             <a:pPr lvl="4"/>
@@ -1660,7 +1660,6 @@
               <a:rPr lang="en-US" smtClean="0"/>
               <a:t>Click to edit Master text styles</a:t>
             </a:r>
-            <a:endParaRPr lang="en-US" smtClean="0"/>
           </a:p>
         </p:txBody>
       </p:sp>
@@ -1717,7 +1716,6 @@
               <a:rPr lang="en-US" smtClean="0"/>
               <a:t>Click to edit Master text styles</a:t>
             </a:r>
-            <a:endParaRPr lang="en-US" smtClean="0"/>
           </a:p>
           <a:p>
             <a:pPr lvl="1"/>
@@ -1725,7 +1723,6 @@
               <a:rPr lang="en-US" smtClean="0"/>
               <a:t>Second level</a:t>
             </a:r>
-            <a:endParaRPr lang="en-US" smtClean="0"/>
           </a:p>
           <a:p>
             <a:pPr lvl="2"/>
@@ -1733,7 +1730,6 @@
               <a:rPr lang="en-US" smtClean="0"/>
               <a:t>Third level</a:t>
             </a:r>
-            <a:endParaRPr lang="en-US" smtClean="0"/>
           </a:p>
           <a:p>
             <a:pPr lvl="3"/>
@@ -1741,7 +1737,6 @@
               <a:rPr lang="en-US" smtClean="0"/>
               <a:t>Fourth level</a:t>
             </a:r>
-            <a:endParaRPr lang="en-US" smtClean="0"/>
           </a:p>
           <a:p>
             <a:pPr lvl="4"/>
@@ -1770,6 +1765,7 @@
           <a:p>
             <a:fld id="{5BCAD085-E8A6-8845-BD4E-CB4CCA059FC4}" type="datetimeFigureOut">
               <a:rPr lang="en-US" smtClean="0"/>
+              <a:t>1/27/13</a:t>
             </a:fld>
             <a:endParaRPr lang="en-US"/>
           </a:p>
@@ -1811,12 +1807,18 @@
           <a:p>
             <a:fld id="{C1FF6DA9-008F-8B48-92A6-B652298478BF}" type="slidenum">
               <a:rPr lang="en-US" smtClean="0"/>
+              <a:t>‹#›</a:t>
             </a:fld>
             <a:endParaRPr lang="en-US"/>
           </a:p>
         </p:txBody>
       </p:sp>
     </p:spTree>
+    <p:extLst>
+      <p:ext uri="{BB962C8B-B14F-4D97-AF65-F5344CB8AC3E}">
+        <p14:creationId xmlns:p14="http://schemas.microsoft.com/office/powerpoint/2010/main" val="990158736"/>
+      </p:ext>
+    </p:extLst>
   </p:cSld>
   <p:clrMapOvr>
     <a:masterClrMapping/>
@@ -1881,6 +1883,7 @@
           <a:p>
             <a:fld id="{5BCAD085-E8A6-8845-BD4E-CB4CCA059FC4}" type="datetimeFigureOut">
               <a:rPr lang="en-US" smtClean="0"/>
+              <a:t>1/27/13</a:t>
             </a:fld>
             <a:endParaRPr lang="en-US"/>
           </a:p>
@@ -1922,12 +1925,18 @@
           <a:p>
             <a:fld id="{C1FF6DA9-008F-8B48-92A6-B652298478BF}" type="slidenum">
               <a:rPr lang="en-US" smtClean="0"/>
+              <a:t>‹#›</a:t>
             </a:fld>
             <a:endParaRPr lang="en-US"/>
           </a:p>
         </p:txBody>
       </p:sp>
     </p:spTree>
+    <p:extLst>
+      <p:ext uri="{BB962C8B-B14F-4D97-AF65-F5344CB8AC3E}">
+        <p14:creationId xmlns:p14="http://schemas.microsoft.com/office/powerpoint/2010/main" val="727027711"/>
+      </p:ext>
+    </p:extLst>
   </p:cSld>
   <p:clrMapOvr>
     <a:masterClrMapping/>
@@ -1969,6 +1978,7 @@
           <a:p>
             <a:fld id="{5BCAD085-E8A6-8845-BD4E-CB4CCA059FC4}" type="datetimeFigureOut">
               <a:rPr lang="en-US" smtClean="0"/>
+              <a:t>1/27/13</a:t>
             </a:fld>
             <a:endParaRPr lang="en-US"/>
           </a:p>
@@ -2010,12 +2020,18 @@
           <a:p>
             <a:fld id="{C1FF6DA9-008F-8B48-92A6-B652298478BF}" type="slidenum">
               <a:rPr lang="en-US" smtClean="0"/>
+              <a:t>‹#›</a:t>
             </a:fld>
             <a:endParaRPr lang="en-US"/>
           </a:p>
         </p:txBody>
       </p:sp>
     </p:spTree>
+    <p:extLst>
+      <p:ext uri="{BB962C8B-B14F-4D97-AF65-F5344CB8AC3E}">
+        <p14:creationId xmlns:p14="http://schemas.microsoft.com/office/powerpoint/2010/main" val="1212999818"/>
+      </p:ext>
+    </p:extLst>
   </p:cSld>
   <p:clrMapOvr>
     <a:masterClrMapping/>
@@ -2125,7 +2141,6 @@
               <a:rPr lang="en-US" smtClean="0"/>
               <a:t>Click to edit Master text styles</a:t>
             </a:r>
-            <a:endParaRPr lang="en-US" smtClean="0"/>
           </a:p>
           <a:p>
             <a:pPr lvl="1"/>
@@ -2133,7 +2148,6 @@
               <a:rPr lang="en-US" smtClean="0"/>
               <a:t>Second level</a:t>
             </a:r>
-            <a:endParaRPr lang="en-US" smtClean="0"/>
           </a:p>
           <a:p>
             <a:pPr lvl="2"/>
@@ -2141,7 +2155,6 @@
               <a:rPr lang="en-US" smtClean="0"/>
               <a:t>Third level</a:t>
             </a:r>
-            <a:endParaRPr lang="en-US" smtClean="0"/>
           </a:p>
           <a:p>
             <a:pPr lvl="3"/>
@@ -2149,7 +2162,6 @@
               <a:rPr lang="en-US" smtClean="0"/>
               <a:t>Fourth level</a:t>
             </a:r>
-            <a:endParaRPr lang="en-US" smtClean="0"/>
           </a:p>
           <a:p>
             <a:pPr lvl="4"/>
@@ -2223,7 +2235,6 @@
               <a:rPr lang="en-US" smtClean="0"/>
               <a:t>Click to edit Master text styles</a:t>
             </a:r>
-            <a:endParaRPr lang="en-US" smtClean="0"/>
           </a:p>
         </p:txBody>
       </p:sp>
@@ -2244,6 +2255,7 @@
           <a:p>
             <a:fld id="{5BCAD085-E8A6-8845-BD4E-CB4CCA059FC4}" type="datetimeFigureOut">
               <a:rPr lang="en-US" smtClean="0"/>
+              <a:t>1/27/13</a:t>
             </a:fld>
             <a:endParaRPr lang="en-US"/>
           </a:p>
@@ -2285,12 +2297,18 @@
           <a:p>
             <a:fld id="{C1FF6DA9-008F-8B48-92A6-B652298478BF}" type="slidenum">
               <a:rPr lang="en-US" smtClean="0"/>
+              <a:t>‹#›</a:t>
             </a:fld>
             <a:endParaRPr lang="en-US"/>
           </a:p>
         </p:txBody>
       </p:sp>
     </p:spTree>
+    <p:extLst>
+      <p:ext uri="{BB962C8B-B14F-4D97-AF65-F5344CB8AC3E}">
+        <p14:creationId xmlns:p14="http://schemas.microsoft.com/office/powerpoint/2010/main" val="1840726560"/>
+      </p:ext>
+    </p:extLst>
   </p:cSld>
   <p:clrMapOvr>
     <a:masterClrMapping/>
@@ -2470,7 +2488,6 @@
               <a:rPr lang="en-US" smtClean="0"/>
               <a:t>Click to edit Master text styles</a:t>
             </a:r>
-            <a:endParaRPr lang="en-US" smtClean="0"/>
           </a:p>
         </p:txBody>
       </p:sp>
@@ -2491,6 +2508,7 @@
           <a:p>
             <a:fld id="{5BCAD085-E8A6-8845-BD4E-CB4CCA059FC4}" type="datetimeFigureOut">
               <a:rPr lang="en-US" smtClean="0"/>
+              <a:t>1/27/13</a:t>
             </a:fld>
             <a:endParaRPr lang="en-US"/>
           </a:p>
@@ -2532,12 +2550,18 @@
           <a:p>
             <a:fld id="{C1FF6DA9-008F-8B48-92A6-B652298478BF}" type="slidenum">
               <a:rPr lang="en-US" smtClean="0"/>
+              <a:t>‹#›</a:t>
             </a:fld>
             <a:endParaRPr lang="en-US"/>
           </a:p>
         </p:txBody>
       </p:sp>
     </p:spTree>
+    <p:extLst>
+      <p:ext uri="{BB962C8B-B14F-4D97-AF65-F5344CB8AC3E}">
+        <p14:creationId xmlns:p14="http://schemas.microsoft.com/office/powerpoint/2010/main" val="3889236939"/>
+      </p:ext>
+    </p:extLst>
   </p:cSld>
   <p:clrMapOvr>
     <a:masterClrMapping/>
@@ -2630,7 +2654,6 @@
               <a:rPr lang="en-US" smtClean="0"/>
               <a:t>Click to edit Master text styles</a:t>
             </a:r>
-            <a:endParaRPr lang="en-US" smtClean="0"/>
           </a:p>
           <a:p>
             <a:pPr lvl="1"/>
@@ -2638,7 +2661,6 @@
               <a:rPr lang="en-US" smtClean="0"/>
               <a:t>Second level</a:t>
             </a:r>
-            <a:endParaRPr lang="en-US" smtClean="0"/>
           </a:p>
           <a:p>
             <a:pPr lvl="2"/>
@@ -2646,7 +2668,6 @@
               <a:rPr lang="en-US" smtClean="0"/>
               <a:t>Third level</a:t>
             </a:r>
-            <a:endParaRPr lang="en-US" smtClean="0"/>
           </a:p>
           <a:p>
             <a:pPr lvl="3"/>
@@ -2654,7 +2675,6 @@
               <a:rPr lang="en-US" smtClean="0"/>
               <a:t>Fourth level</a:t>
             </a:r>
-            <a:endParaRPr lang="en-US" smtClean="0"/>
           </a:p>
           <a:p>
             <a:pPr lvl="4"/>
@@ -2701,6 +2721,7 @@
           <a:p>
             <a:fld id="{5BCAD085-E8A6-8845-BD4E-CB4CCA059FC4}" type="datetimeFigureOut">
               <a:rPr lang="en-US" smtClean="0"/>
+              <a:t>1/27/13</a:t>
             </a:fld>
             <a:endParaRPr lang="en-US"/>
           </a:p>
@@ -2778,12 +2799,18 @@
           <a:p>
             <a:fld id="{C1FF6DA9-008F-8B48-92A6-B652298478BF}" type="slidenum">
               <a:rPr lang="en-US" smtClean="0"/>
+              <a:t>‹#›</a:t>
             </a:fld>
             <a:endParaRPr lang="en-US"/>
           </a:p>
         </p:txBody>
       </p:sp>
     </p:spTree>
+    <p:extLst>
+      <p:ext uri="{BB962C8B-B14F-4D97-AF65-F5344CB8AC3E}">
+        <p14:creationId xmlns:p14="http://schemas.microsoft.com/office/powerpoint/2010/main" val="2209977519"/>
+      </p:ext>
+    </p:extLst>
   </p:cSld>
   <p:clrMap bg1="lt1" tx1="dk1" bg2="lt2" tx2="dk2" accent1="accent1" accent2="accent2" accent3="accent3" accent4="accent4" accent5="accent5" accent6="accent6" hlink="hlink" folHlink="folHlink"/>
   <p:sldLayoutIdLst>
@@ -2821,7 +2848,7 @@
         <a:spcBef>
           <a:spcPct val="20000"/>
         </a:spcBef>
-        <a:buFont typeface="Arial" panose="020B0604020202020204"/>
+        <a:buFont typeface="Arial"/>
         <a:buChar char="•"/>
         <a:defRPr sz="3200" kern="1200">
           <a:solidFill>
@@ -2836,7 +2863,7 @@
         <a:spcBef>
           <a:spcPct val="20000"/>
         </a:spcBef>
-        <a:buFont typeface="Arial" panose="020B0604020202020204"/>
+        <a:buFont typeface="Arial"/>
         <a:buChar char="–"/>
         <a:defRPr sz="2800" kern="1200">
           <a:solidFill>
@@ -2851,7 +2878,7 @@
         <a:spcBef>
           <a:spcPct val="20000"/>
         </a:spcBef>
-        <a:buFont typeface="Arial" panose="020B0604020202020204"/>
+        <a:buFont typeface="Arial"/>
         <a:buChar char="•"/>
         <a:defRPr sz="2400" kern="1200">
           <a:solidFill>
@@ -2866,7 +2893,7 @@
         <a:spcBef>
           <a:spcPct val="20000"/>
         </a:spcBef>
-        <a:buFont typeface="Arial" panose="020B0604020202020204"/>
+        <a:buFont typeface="Arial"/>
         <a:buChar char="–"/>
         <a:defRPr sz="2000" kern="1200">
           <a:solidFill>
@@ -2881,7 +2908,7 @@
         <a:spcBef>
           <a:spcPct val="20000"/>
         </a:spcBef>
-        <a:buFont typeface="Arial" panose="020B0604020202020204"/>
+        <a:buFont typeface="Arial"/>
         <a:buChar char="»"/>
         <a:defRPr sz="2000" kern="1200">
           <a:solidFill>
@@ -2896,7 +2923,7 @@
         <a:spcBef>
           <a:spcPct val="20000"/>
         </a:spcBef>
-        <a:buFont typeface="Arial" panose="020B0604020202020204"/>
+        <a:buFont typeface="Arial"/>
         <a:buChar char="•"/>
         <a:defRPr sz="2000" kern="1200">
           <a:solidFill>
@@ -2911,7 +2938,7 @@
         <a:spcBef>
           <a:spcPct val="20000"/>
         </a:spcBef>
-        <a:buFont typeface="Arial" panose="020B0604020202020204"/>
+        <a:buFont typeface="Arial"/>
         <a:buChar char="•"/>
         <a:defRPr sz="2000" kern="1200">
           <a:solidFill>
@@ -2926,7 +2953,7 @@
         <a:spcBef>
           <a:spcPct val="20000"/>
         </a:spcBef>
-        <a:buFont typeface="Arial" panose="020B0604020202020204"/>
+        <a:buFont typeface="Arial"/>
         <a:buChar char="•"/>
         <a:defRPr sz="2000" kern="1200">
           <a:solidFill>
@@ -2941,7 +2968,7 @@
         <a:spcBef>
           <a:spcPct val="20000"/>
         </a:spcBef>
-        <a:buFont typeface="Arial" panose="020B0604020202020204"/>
+        <a:buFont typeface="Arial"/>
         <a:buChar char="•"/>
         <a:defRPr sz="2000" kern="1200">
           <a:solidFill>
@@ -3053,7 +3080,7 @@
 </file>
 
 <file path=ppt/slides/slide1.xml><?xml version="1.0" encoding="utf-8"?>
-<p:sld xmlns:a="http://schemas.openxmlformats.org/drawingml/2006/main" xmlns:r="http://schemas.openxmlformats.org/officeDocument/2006/relationships" xmlns:p="http://schemas.openxmlformats.org/presentationml/2006/main">
+<p:sld xmlns:a="http://schemas.openxmlformats.org/drawingml/2006/main" xmlns:p="http://schemas.openxmlformats.org/presentationml/2006/main" xmlns:r="http://schemas.openxmlformats.org/officeDocument/2006/relationships">
   <p:cSld>
     <p:bg>
       <p:bgPr>
@@ -3121,8 +3148,8 @@
         </p:nvSpPr>
         <p:spPr>
           <a:xfrm>
-            <a:off x="731520" y="457200"/>
-            <a:ext cx="7315200" cy="457200"/>
+            <a:off x="731520" y="320040"/>
+            <a:ext cx="10058400" cy="502920"/>
           </a:xfrm>
           <a:prstGeom prst="rect">
             <a:avLst/>
@@ -3136,15 +3163,15 @@
           <a:lstStyle/>
           <a:p>
             <a:pPr algn="l">
-              <a:defRPr sz="3600" b="1">
+              <a:defRPr sz="3200" b="1">
                 <a:solidFill>
                   <a:srgbClr val="0F172A"/>
                 </a:solidFill>
-                <a:latin typeface="Calibri" panose="020F0502020204030204"/>
+                <a:latin typeface="Calibri"/>
               </a:defRPr>
             </a:pPr>
             <a:r>
-              <a:t>What Is RAG?</a:t>
+              <a:t>What Is RAG — and Why Do We Need It?</a:t>
             </a:r>
           </a:p>
         </p:txBody>
@@ -3157,8 +3184,8 @@
         </p:nvSpPr>
         <p:spPr>
           <a:xfrm>
-            <a:off x="731520" y="914400"/>
-            <a:ext cx="10058400" cy="548640"/>
+            <a:off x="731520" y="868680"/>
+            <a:ext cx="10698480" cy="457200"/>
           </a:xfrm>
           <a:prstGeom prst="rect">
             <a:avLst/>
@@ -3172,15 +3199,15 @@
           <a:lstStyle/>
           <a:p>
             <a:pPr algn="l">
-              <a:defRPr sz="1800" b="0">
+              <a:defRPr sz="1600" b="0">
                 <a:solidFill>
                   <a:srgbClr val="64748B"/>
                 </a:solidFill>
-                <a:latin typeface="Calibri" panose="020F0502020204030204"/>
+                <a:latin typeface="Calibri"/>
               </a:defRPr>
             </a:pPr>
             <a:r>
-              <a:t>Retrieval-Augmented Generation — making AI answer questions using YOUR data, not just what it learned from the internet.</a:t>
+              <a:t>Retrieval-Augmented Generation: before answering, the AI looks up the most relevant pieces of YOUR data and answers from those.</a:t>
             </a:r>
           </a:p>
         </p:txBody>
@@ -3193,8 +3220,8 @@
         </p:nvSpPr>
         <p:spPr>
           <a:xfrm>
-            <a:off x="731520" y="1554480"/>
-            <a:ext cx="3291840" cy="1097280"/>
+            <a:off x="731520" y="1371600"/>
+            <a:ext cx="3383280" cy="1051560"/>
           </a:xfrm>
           <a:prstGeom prst="roundRect">
             <a:avLst/>
@@ -3223,15 +3250,15 @@
           </a:fontRef>
         </p:style>
         <p:txBody>
-          <a:bodyPr wrap="square" rtlCol="0" anchor="ctr"/>
+          <a:bodyPr rtlCol="0" anchor="ctr" wrap="square"/>
           <a:lstStyle/>
           <a:p>
             <a:pPr algn="l">
-              <a:defRPr sz="2200" b="1">
+              <a:defRPr sz="2000" b="1">
                 <a:solidFill>
                   <a:srgbClr val="0F172A"/>
                 </a:solidFill>
-                <a:latin typeface="Calibri" panose="020F0502020204030204"/>
+                <a:latin typeface="Calibri"/>
               </a:defRPr>
             </a:pPr>
             <a:r>
@@ -3240,15 +3267,15 @@
           </a:p>
           <a:p>
             <a:pPr algn="l">
-              <a:defRPr sz="1500">
+              <a:defRPr sz="1300">
                 <a:solidFill>
                   <a:srgbClr val="64748B"/>
                 </a:solidFill>
-                <a:latin typeface="Calibri" panose="020F0502020204030204"/>
+                <a:latin typeface="Calibri"/>
               </a:defRPr>
             </a:pPr>
             <a:r>
-              <a:t>  Find relevant documents</a:t>
+              <a:t>  Search your data for the most relevant pieces</a:t>
             </a:r>
           </a:p>
         </p:txBody>
@@ -3261,8 +3288,8 @@
         </p:nvSpPr>
         <p:spPr>
           <a:xfrm>
-            <a:off x="4480559" y="1554480"/>
-            <a:ext cx="3291840" cy="1097280"/>
+            <a:off x="4480559" y="1371600"/>
+            <a:ext cx="3383280" cy="1051560"/>
           </a:xfrm>
           <a:prstGeom prst="roundRect">
             <a:avLst/>
@@ -3291,15 +3318,15 @@
           </a:fontRef>
         </p:style>
         <p:txBody>
-          <a:bodyPr wrap="square" rtlCol="0" anchor="ctr"/>
+          <a:bodyPr rtlCol="0" anchor="ctr" wrap="square"/>
           <a:lstStyle/>
           <a:p>
             <a:pPr algn="l">
-              <a:defRPr sz="2200" b="1">
+              <a:defRPr sz="2000" b="1">
                 <a:solidFill>
                   <a:srgbClr val="0F172A"/>
                 </a:solidFill>
-                <a:latin typeface="Calibri" panose="020F0502020204030204"/>
+                <a:latin typeface="Calibri"/>
               </a:defRPr>
             </a:pPr>
             <a:r>
@@ -3308,15 +3335,15 @@
           </a:p>
           <a:p>
             <a:pPr algn="l">
-              <a:defRPr sz="1500">
+              <a:defRPr sz="1300">
                 <a:solidFill>
                   <a:srgbClr val="64748B"/>
                 </a:solidFill>
-                <a:latin typeface="Calibri" panose="020F0502020204030204"/>
+                <a:latin typeface="Calibri"/>
               </a:defRPr>
             </a:pPr>
             <a:r>
-              <a:t>  Add them as context</a:t>
+              <a:t>  Add those pieces to the prompt as context</a:t>
             </a:r>
           </a:p>
         </p:txBody>
@@ -3329,8 +3356,8 @@
         </p:nvSpPr>
         <p:spPr>
           <a:xfrm>
-            <a:off x="8229600" y="1554480"/>
-            <a:ext cx="3291840" cy="1097280"/>
+            <a:off x="8229600" y="1371600"/>
+            <a:ext cx="3383280" cy="1051560"/>
           </a:xfrm>
           <a:prstGeom prst="roundRect">
             <a:avLst/>
@@ -3359,15 +3386,15 @@
           </a:fontRef>
         </p:style>
         <p:txBody>
-          <a:bodyPr wrap="square" rtlCol="0" anchor="ctr"/>
+          <a:bodyPr rtlCol="0" anchor="ctr" wrap="square"/>
           <a:lstStyle/>
           <a:p>
             <a:pPr algn="l">
-              <a:defRPr sz="2200" b="1">
+              <a:defRPr sz="2000" b="1">
                 <a:solidFill>
                   <a:srgbClr val="0F172A"/>
                 </a:solidFill>
-                <a:latin typeface="Calibri" panose="020F0502020204030204"/>
+                <a:latin typeface="Calibri"/>
               </a:defRPr>
             </a:pPr>
             <a:r>
@@ -3376,84 +3403,29 @@
           </a:p>
           <a:p>
             <a:pPr algn="l">
-              <a:defRPr sz="1500">
+              <a:defRPr sz="1300">
                 <a:solidFill>
                   <a:srgbClr val="64748B"/>
                 </a:solidFill>
-                <a:latin typeface="Calibri" panose="020F0502020204030204"/>
+                <a:latin typeface="Calibri"/>
               </a:defRPr>
             </a:pPr>
             <a:r>
-              <a:t>  AI answers from context</a:t>
-            </a:r>
-          </a:p>
-        </p:txBody>
-      </p:sp>
-      <p:sp>
-        <p:nvSpPr>
-          <p:cNvPr id="8" name="Rounded Rectangle 7"/>
-          <p:cNvSpPr/>
+              <a:t>  The LLM answers using only that context</a:t>
+            </a:r>
+          </a:p>
+        </p:txBody>
+      </p:sp>
+      <p:sp>
+        <p:nvSpPr>
+          <p:cNvPr id="8" name="TextBox 7"/>
+          <p:cNvSpPr txBox="1"/>
           <p:nvPr/>
         </p:nvSpPr>
         <p:spPr>
           <a:xfrm>
-            <a:off x="731520" y="2926080"/>
-            <a:ext cx="10698480" cy="1463040"/>
-          </a:xfrm>
-          <a:prstGeom prst="roundRect">
-            <a:avLst/>
-          </a:prstGeom>
-          <a:solidFill>
-            <a:srgbClr val="F0FDF4"/>
-          </a:solidFill>
-          <a:ln w="12700">
-            <a:solidFill>
-              <a:srgbClr val="16A34A"/>
-            </a:solidFill>
-          </a:ln>
-        </p:spPr>
-        <p:style>
-          <a:lnRef idx="1">
-            <a:schemeClr val="accent1"/>
-          </a:lnRef>
-          <a:fillRef idx="3">
-            <a:schemeClr val="accent1"/>
-          </a:fillRef>
-          <a:effectRef idx="2">
-            <a:schemeClr val="accent1"/>
-          </a:effectRef>
-          <a:fontRef idx="minor">
-            <a:schemeClr val="lt1"/>
-          </a:fontRef>
-        </p:style>
-        <p:txBody>
-          <a:bodyPr wrap="square" rtlCol="0" anchor="ctr"/>
-          <a:lstStyle/>
-          <a:p>
-            <a:pPr algn="l">
-              <a:defRPr sz="2000" b="1">
-                <a:solidFill>
-                  <a:srgbClr val="0F172A"/>
-                </a:solidFill>
-                <a:latin typeface="Calibri" panose="020F0502020204030204"/>
-              </a:defRPr>
-            </a:pPr>
-            <a:r>
-              <a:t>📁  The Filing Cabinet Analogy</a:t>
-            </a:r>
-          </a:p>
-        </p:txBody>
-      </p:sp>
-      <p:sp>
-        <p:nvSpPr>
-          <p:cNvPr id="9" name="TextBox 8"/>
-          <p:cNvSpPr txBox="1"/>
-          <p:nvPr/>
-        </p:nvSpPr>
-        <p:spPr>
-          <a:xfrm>
-            <a:off x="914400" y="3200400"/>
-            <a:ext cx="10058400" cy="365760"/>
+            <a:off x="731520" y="2606040"/>
+            <a:ext cx="5486400" cy="365760"/>
           </a:xfrm>
           <a:prstGeom prst="rect">
             <a:avLst/>
@@ -3467,101 +3439,29 @@
           <a:lstStyle/>
           <a:p>
             <a:pPr algn="l">
-              <a:defRPr sz="1500" b="0">
+              <a:defRPr sz="1800" b="1">
                 <a:solidFill>
                   <a:srgbClr val="0F172A"/>
                 </a:solidFill>
-                <a:latin typeface="Calibri" panose="020F0502020204030204"/>
+                <a:latin typeface="Calibri"/>
               </a:defRPr>
             </a:pPr>
             <a:r>
-              <a:t>Imagine you're a personal trainer (the AI) with a filing cabinet of 500 exercise cards (your database). A client asks: "Give me exercises for my calf."</a:t>
-            </a:r>
-          </a:p>
-        </p:txBody>
-      </p:sp>
-      <p:sp>
-        <p:nvSpPr>
-          <p:cNvPr id="10" name="TextBox 9"/>
-          <p:cNvSpPr txBox="1"/>
+              <a:t>Why is it needed?  Three problems with a plain LLM:</a:t>
+            </a:r>
+          </a:p>
+        </p:txBody>
+      </p:sp>
+      <p:sp>
+        <p:nvSpPr>
+          <p:cNvPr id="9" name="Rounded Rectangle 8"/>
+          <p:cNvSpPr/>
           <p:nvPr/>
         </p:nvSpPr>
         <p:spPr>
           <a:xfrm>
-            <a:off x="914400" y="3611880"/>
-            <a:ext cx="10058400" cy="365760"/>
-          </a:xfrm>
-          <a:prstGeom prst="rect">
-            <a:avLst/>
-          </a:prstGeom>
-          <a:noFill/>
-        </p:spPr>
-        <p:txBody>
-          <a:bodyPr wrap="square">
-            <a:spAutoFit/>
-          </a:bodyPr>
-          <a:lstStyle/>
-          <a:p>
-            <a:pPr algn="l">
-              <a:defRPr sz="1500" b="0">
-                <a:solidFill>
-                  <a:srgbClr val="DC2626"/>
-                </a:solidFill>
-                <a:latin typeface="Calibri" panose="020F0502020204030204"/>
-              </a:defRPr>
-            </a:pPr>
-            <a:r>
-              <a:t>❌  Without RAG: You guess from memory — you might invent exercises or get muscles wrong.</a:t>
-            </a:r>
-          </a:p>
-        </p:txBody>
-      </p:sp>
-      <p:sp>
-        <p:nvSpPr>
-          <p:cNvPr id="11" name="TextBox 10"/>
-          <p:cNvSpPr txBox="1"/>
-          <p:nvPr/>
-        </p:nvSpPr>
-        <p:spPr>
-          <a:xfrm>
-            <a:off x="914400" y="3886200"/>
-            <a:ext cx="10058400" cy="365760"/>
-          </a:xfrm>
-          <a:prstGeom prst="rect">
-            <a:avLst/>
-          </a:prstGeom>
-          <a:noFill/>
-        </p:spPr>
-        <p:txBody>
-          <a:bodyPr wrap="square">
-            <a:spAutoFit/>
-          </a:bodyPr>
-          <a:lstStyle/>
-          <a:p>
-            <a:pPr algn="l">
-              <a:defRPr sz="1500" b="0">
-                <a:solidFill>
-                  <a:srgbClr val="16A34A"/>
-                </a:solidFill>
-                <a:latin typeface="Calibri" panose="020F0502020204030204"/>
-              </a:defRPr>
-            </a:pPr>
-            <a:r>
-              <a:t>✅  With RAG: You pull the 3 most relevant cards and answer using ONLY what's on those cards.</a:t>
-            </a:r>
-          </a:p>
-        </p:txBody>
-      </p:sp>
-      <p:sp>
-        <p:nvSpPr>
-          <p:cNvPr id="12" name="Rounded Rectangle 11"/>
-          <p:cNvSpPr/>
-          <p:nvPr/>
-        </p:nvSpPr>
-        <p:spPr>
-          <a:xfrm>
-            <a:off x="731520" y="4754880"/>
-            <a:ext cx="5120640" cy="1828800"/>
+            <a:off x="731520" y="3017520"/>
+            <a:ext cx="3383280" cy="1600200"/>
           </a:xfrm>
           <a:prstGeom prst="roundRect">
             <a:avLst/>
@@ -3590,84 +3490,100 @@
           </a:fontRef>
         </p:style>
         <p:txBody>
-          <a:bodyPr wrap="square" lIns="137160" tIns="91440" bIns="91440" rtlCol="0" anchor="ctr"/>
+          <a:bodyPr rtlCol="0" anchor="ctr" wrap="square" lIns="137160" tIns="91440" bIns="91440"/>
           <a:lstStyle/>
           <a:p>
             <a:pPr algn="ctr">
               <a:spcAft>
-                <a:spcPts val="800"/>
+                <a:spcPts val="600"/>
               </a:spcAft>
-              <a:defRPr sz="1800" b="1">
+              <a:defRPr sz="1700" b="1">
                 <a:solidFill>
                   <a:srgbClr val="0F172A"/>
                 </a:solidFill>
-                <a:latin typeface="Calibri" panose="020F0502020204030204"/>
+                <a:latin typeface="Calibri"/>
               </a:defRPr>
             </a:pPr>
             <a:r>
-              <a:t>🏗️  Phase 1: Indexing (Setup)</a:t>
+              <a:t>🤯  Hallucination</a:t>
             </a:r>
           </a:p>
           <a:p>
             <a:pPr>
               <a:spcAft>
-                <a:spcPts val="400"/>
+                <a:spcPts val="300"/>
               </a:spcAft>
-              <a:defRPr sz="1400">
+              <a:defRPr sz="1300">
                 <a:solidFill>
                   <a:srgbClr val="64748B"/>
                 </a:solidFill>
-                <a:latin typeface="Calibri" panose="020F0502020204030204"/>
+                <a:latin typeface="Calibri"/>
               </a:defRPr>
             </a:pPr>
             <a:r>
-              <a:t>Each exercise → 'vector fingerprint' (unique number pattern)</a:t>
+              <a:t>LLMs confidently make things up.</a:t>
             </a:r>
           </a:p>
           <a:p>
             <a:pPr>
               <a:spcAft>
-                <a:spcPts val="400"/>
+                <a:spcPts val="300"/>
               </a:spcAft>
-              <a:defRPr sz="1400">
+              <a:defRPr sz="1300">
                 <a:solidFill>
                   <a:srgbClr val="64748B"/>
                 </a:solidFill>
-                <a:latin typeface="Calibri" panose="020F0502020204030204"/>
+                <a:latin typeface="Calibri"/>
               </a:defRPr>
             </a:pPr>
             <a:r>
-              <a:t>Stored in a vector database (Qdrant)</a:t>
+              <a:t>Grounding answers in retrieved</a:t>
             </a:r>
           </a:p>
           <a:p>
             <a:pPr>
               <a:spcAft>
-                <a:spcPts val="400"/>
+                <a:spcPts val="300"/>
               </a:spcAft>
-              <a:defRPr sz="1400">
+              <a:defRPr sz="1300">
                 <a:solidFill>
                   <a:srgbClr val="64748B"/>
                 </a:solidFill>
-                <a:latin typeface="Calibri" panose="020F0502020204030204"/>
+                <a:latin typeface="Calibri"/>
               </a:defRPr>
             </a:pPr>
             <a:r>
-              <a:t>Happens once, or when new exercises are added</a:t>
-            </a:r>
-          </a:p>
-        </p:txBody>
-      </p:sp>
-      <p:sp>
-        <p:nvSpPr>
-          <p:cNvPr id="13" name="Rounded Rectangle 12"/>
+              <a:t>documents forces the model to stick</a:t>
+            </a:r>
+          </a:p>
+          <a:p>
+            <a:pPr>
+              <a:spcAft>
+                <a:spcPts val="300"/>
+              </a:spcAft>
+              <a:defRPr sz="1300">
+                <a:solidFill>
+                  <a:srgbClr val="64748B"/>
+                </a:solidFill>
+                <a:latin typeface="Calibri"/>
+              </a:defRPr>
+            </a:pPr>
+            <a:r>
+              <a:t>to facts that actually exist.</a:t>
+            </a:r>
+          </a:p>
+        </p:txBody>
+      </p:sp>
+      <p:sp>
+        <p:nvSpPr>
+          <p:cNvPr id="10" name="Rounded Rectangle 9"/>
           <p:cNvSpPr/>
           <p:nvPr/>
         </p:nvSpPr>
         <p:spPr>
           <a:xfrm>
-            <a:off x="6309360" y="4754880"/>
-            <a:ext cx="5120640" cy="1828800"/>
+            <a:off x="4480559" y="3017520"/>
+            <a:ext cx="3383280" cy="1600200"/>
           </a:xfrm>
           <a:prstGeom prst="roundRect">
             <a:avLst/>
@@ -3696,70 +3612,420 @@
           </a:fontRef>
         </p:style>
         <p:txBody>
-          <a:bodyPr wrap="square" lIns="137160" tIns="91440" bIns="91440" rtlCol="0" anchor="ctr"/>
+          <a:bodyPr rtlCol="0" anchor="ctr" wrap="square" lIns="137160" tIns="91440" bIns="91440"/>
           <a:lstStyle/>
           <a:p>
             <a:pPr algn="ctr">
               <a:spcAft>
-                <a:spcPts val="800"/>
+                <a:spcPts val="600"/>
               </a:spcAft>
-              <a:defRPr sz="1800" b="1">
+              <a:defRPr sz="1700" b="1">
                 <a:solidFill>
                   <a:srgbClr val="0F172A"/>
                 </a:solidFill>
-                <a:latin typeface="Calibri" panose="020F0502020204030204"/>
+                <a:latin typeface="Calibri"/>
               </a:defRPr>
             </a:pPr>
             <a:r>
-              <a:t>🔍  Phase 2: Querying (Every Question)</a:t>
+              <a:t>📅  Frozen, generic knowledge</a:t>
             </a:r>
           </a:p>
           <a:p>
             <a:pPr>
               <a:spcAft>
-                <a:spcPts val="400"/>
+                <a:spcPts val="300"/>
               </a:spcAft>
-              <a:defRPr sz="1400">
+              <a:defRPr sz="1300">
                 <a:solidFill>
                   <a:srgbClr val="64748B"/>
                 </a:solidFill>
-                <a:latin typeface="Calibri" panose="020F0502020204030204"/>
+                <a:latin typeface="Calibri"/>
               </a:defRPr>
             </a:pPr>
             <a:r>
-              <a:t>Your question → same fingerprint type</a:t>
+              <a:t>A model only knows its training data.</a:t>
             </a:r>
           </a:p>
           <a:p>
             <a:pPr>
               <a:spcAft>
-                <a:spcPts val="400"/>
+                <a:spcPts val="300"/>
               </a:spcAft>
-              <a:defRPr sz="1400">
+              <a:defRPr sz="1300">
                 <a:solidFill>
                   <a:srgbClr val="64748B"/>
                 </a:solidFill>
-                <a:latin typeface="Calibri" panose="020F0502020204030204"/>
+                <a:latin typeface="Calibri"/>
               </a:defRPr>
             </a:pPr>
             <a:r>
-              <a:t>DB finds 3 most similar fingerprints (semantic search)</a:t>
+              <a:t>Your private, domain-specific or</a:t>
             </a:r>
           </a:p>
           <a:p>
             <a:pPr>
               <a:spcAft>
-                <a:spcPts val="400"/>
+                <a:spcPts val="300"/>
               </a:spcAft>
-              <a:defRPr sz="1400">
+              <a:defRPr sz="1300">
                 <a:solidFill>
                   <a:srgbClr val="64748B"/>
                 </a:solidFill>
-                <a:latin typeface="Calibri" panose="020F0502020204030204"/>
+                <a:latin typeface="Calibri"/>
               </a:defRPr>
             </a:pPr>
             <a:r>
-              <a:t>Gemini answers using ONLY those 3 results</a:t>
+              <a:t>recently added data simply isn't</a:t>
+            </a:r>
+          </a:p>
+          <a:p>
+            <a:pPr>
+              <a:spcAft>
+                <a:spcPts val="300"/>
+              </a:spcAft>
+              <a:defRPr sz="1300">
+                <a:solidFill>
+                  <a:srgbClr val="64748B"/>
+                </a:solidFill>
+                <a:latin typeface="Calibri"/>
+              </a:defRPr>
+            </a:pPr>
+            <a:r>
+              <a:t>in there — retrieval brings it in.</a:t>
+            </a:r>
+          </a:p>
+        </p:txBody>
+      </p:sp>
+      <p:sp>
+        <p:nvSpPr>
+          <p:cNvPr id="11" name="Rounded Rectangle 10"/>
+          <p:cNvSpPr/>
+          <p:nvPr/>
+        </p:nvSpPr>
+        <p:spPr>
+          <a:xfrm>
+            <a:off x="8229600" y="3017520"/>
+            <a:ext cx="3383280" cy="1600200"/>
+          </a:xfrm>
+          <a:prstGeom prst="roundRect">
+            <a:avLst/>
+          </a:prstGeom>
+          <a:solidFill>
+            <a:srgbClr val="F8FAFC"/>
+          </a:solidFill>
+          <a:ln w="12700">
+            <a:solidFill>
+              <a:srgbClr val="E2E8F0"/>
+            </a:solidFill>
+          </a:ln>
+        </p:spPr>
+        <p:style>
+          <a:lnRef idx="1">
+            <a:schemeClr val="accent1"/>
+          </a:lnRef>
+          <a:fillRef idx="3">
+            <a:schemeClr val="accent1"/>
+          </a:fillRef>
+          <a:effectRef idx="2">
+            <a:schemeClr val="accent1"/>
+          </a:effectRef>
+          <a:fontRef idx="minor">
+            <a:schemeClr val="lt1"/>
+          </a:fontRef>
+        </p:style>
+        <p:txBody>
+          <a:bodyPr rtlCol="0" anchor="ctr" wrap="square" lIns="137160" tIns="91440" bIns="91440"/>
+          <a:lstStyle/>
+          <a:p>
+            <a:pPr algn="ctr">
+              <a:spcAft>
+                <a:spcPts val="600"/>
+              </a:spcAft>
+              <a:defRPr sz="1700" b="1">
+                <a:solidFill>
+                  <a:srgbClr val="0F172A"/>
+                </a:solidFill>
+                <a:latin typeface="Calibri"/>
+              </a:defRPr>
+            </a:pPr>
+            <a:r>
+              <a:t>📏  Context windows are finite</a:t>
+            </a:r>
+          </a:p>
+          <a:p>
+            <a:pPr>
+              <a:spcAft>
+                <a:spcPts val="300"/>
+              </a:spcAft>
+              <a:defRPr sz="1300">
+                <a:solidFill>
+                  <a:srgbClr val="64748B"/>
+                </a:solidFill>
+                <a:latin typeface="Calibri"/>
+              </a:defRPr>
+            </a:pPr>
+            <a:r>
+              <a:t>You can't paste everything into a</a:t>
+            </a:r>
+          </a:p>
+          <a:p>
+            <a:pPr>
+              <a:spcAft>
+                <a:spcPts val="300"/>
+              </a:spcAft>
+              <a:defRPr sz="1300">
+                <a:solidFill>
+                  <a:srgbClr val="64748B"/>
+                </a:solidFill>
+                <a:latin typeface="Calibri"/>
+              </a:defRPr>
+            </a:pPr>
+            <a:r>
+              <a:t>prompt — there's a hard size limit,</a:t>
+            </a:r>
+          </a:p>
+          <a:p>
+            <a:pPr>
+              <a:spcAft>
+                <a:spcPts val="300"/>
+              </a:spcAft>
+              <a:defRPr sz="1300">
+                <a:solidFill>
+                  <a:srgbClr val="64748B"/>
+                </a:solidFill>
+                <a:latin typeface="Calibri"/>
+              </a:defRPr>
+            </a:pPr>
+            <a:r>
+              <a:t>and every token costs money.</a:t>
+            </a:r>
+          </a:p>
+          <a:p>
+            <a:pPr>
+              <a:spcAft>
+                <a:spcPts val="300"/>
+              </a:spcAft>
+              <a:defRPr sz="1300">
+                <a:solidFill>
+                  <a:srgbClr val="64748B"/>
+                </a:solidFill>
+                <a:latin typeface="Calibri"/>
+              </a:defRPr>
+            </a:pPr>
+            <a:r>
+              <a:t>Retrieval sends only what matters.</a:t>
+            </a:r>
+          </a:p>
+        </p:txBody>
+      </p:sp>
+      <p:sp>
+        <p:nvSpPr>
+          <p:cNvPr id="12" name="Rounded Rectangle 11"/>
+          <p:cNvSpPr/>
+          <p:nvPr/>
+        </p:nvSpPr>
+        <p:spPr>
+          <a:xfrm>
+            <a:off x="731520" y="4754880"/>
+            <a:ext cx="5120640" cy="1645920"/>
+          </a:xfrm>
+          <a:prstGeom prst="roundRect">
+            <a:avLst/>
+          </a:prstGeom>
+          <a:solidFill>
+            <a:srgbClr val="F8FAFC"/>
+          </a:solidFill>
+          <a:ln w="12700">
+            <a:solidFill>
+              <a:srgbClr val="E2E8F0"/>
+            </a:solidFill>
+          </a:ln>
+        </p:spPr>
+        <p:style>
+          <a:lnRef idx="1">
+            <a:schemeClr val="accent1"/>
+          </a:lnRef>
+          <a:fillRef idx="3">
+            <a:schemeClr val="accent1"/>
+          </a:fillRef>
+          <a:effectRef idx="2">
+            <a:schemeClr val="accent1"/>
+          </a:effectRef>
+          <a:fontRef idx="minor">
+            <a:schemeClr val="lt1"/>
+          </a:fontRef>
+        </p:style>
+        <p:txBody>
+          <a:bodyPr rtlCol="0" anchor="ctr" wrap="square" lIns="137160" tIns="91440" bIns="91440"/>
+          <a:lstStyle/>
+          <a:p>
+            <a:pPr algn="ctr">
+              <a:spcAft>
+                <a:spcPts val="600"/>
+              </a:spcAft>
+              <a:defRPr sz="1700" b="1">
+                <a:solidFill>
+                  <a:srgbClr val="0F172A"/>
+                </a:solidFill>
+                <a:latin typeface="Calibri"/>
+              </a:defRPr>
+            </a:pPr>
+            <a:r>
+              <a:t>🏗️  Step 1 — Indexing (done once, offline)</a:t>
+            </a:r>
+          </a:p>
+          <a:p>
+            <a:pPr>
+              <a:spcAft>
+                <a:spcPts val="300"/>
+              </a:spcAft>
+              <a:defRPr sz="1300">
+                <a:solidFill>
+                  <a:srgbClr val="64748B"/>
+                </a:solidFill>
+                <a:latin typeface="Calibri"/>
+              </a:defRPr>
+            </a:pPr>
+            <a:r>
+              <a:t>Split your documents into chunks</a:t>
+            </a:r>
+          </a:p>
+          <a:p>
+            <a:pPr>
+              <a:spcAft>
+                <a:spcPts val="300"/>
+              </a:spcAft>
+              <a:defRPr sz="1300">
+                <a:solidFill>
+                  <a:srgbClr val="64748B"/>
+                </a:solidFill>
+                <a:latin typeface="Calibri"/>
+              </a:defRPr>
+            </a:pPr>
+            <a:r>
+              <a:t>Turn each chunk into an embedding (a 'meaning fingerprint')</a:t>
+            </a:r>
+          </a:p>
+          <a:p>
+            <a:pPr>
+              <a:spcAft>
+                <a:spcPts val="300"/>
+              </a:spcAft>
+              <a:defRPr sz="1300">
+                <a:solidFill>
+                  <a:srgbClr val="64748B"/>
+                </a:solidFill>
+                <a:latin typeface="Calibri"/>
+              </a:defRPr>
+            </a:pPr>
+            <a:r>
+              <a:t>Store the embeddings in a vector database</a:t>
+            </a:r>
+          </a:p>
+        </p:txBody>
+      </p:sp>
+      <p:sp>
+        <p:nvSpPr>
+          <p:cNvPr id="13" name="Rounded Rectangle 12"/>
+          <p:cNvSpPr/>
+          <p:nvPr/>
+        </p:nvSpPr>
+        <p:spPr>
+          <a:xfrm>
+            <a:off x="6309360" y="4754880"/>
+            <a:ext cx="5120640" cy="1645920"/>
+          </a:xfrm>
+          <a:prstGeom prst="roundRect">
+            <a:avLst/>
+          </a:prstGeom>
+          <a:solidFill>
+            <a:srgbClr val="F8FAFC"/>
+          </a:solidFill>
+          <a:ln w="12700">
+            <a:solidFill>
+              <a:srgbClr val="E2E8F0"/>
+            </a:solidFill>
+          </a:ln>
+        </p:spPr>
+        <p:style>
+          <a:lnRef idx="1">
+            <a:schemeClr val="accent1"/>
+          </a:lnRef>
+          <a:fillRef idx="3">
+            <a:schemeClr val="accent1"/>
+          </a:fillRef>
+          <a:effectRef idx="2">
+            <a:schemeClr val="accent1"/>
+          </a:effectRef>
+          <a:fontRef idx="minor">
+            <a:schemeClr val="lt1"/>
+          </a:fontRef>
+        </p:style>
+        <p:txBody>
+          <a:bodyPr rtlCol="0" anchor="ctr" wrap="square" lIns="137160" tIns="91440" bIns="91440"/>
+          <a:lstStyle/>
+          <a:p>
+            <a:pPr algn="ctr">
+              <a:spcAft>
+                <a:spcPts val="600"/>
+              </a:spcAft>
+              <a:defRPr sz="1700" b="1">
+                <a:solidFill>
+                  <a:srgbClr val="0F172A"/>
+                </a:solidFill>
+                <a:latin typeface="Calibri"/>
+              </a:defRPr>
+            </a:pPr>
+            <a:r>
+              <a:t>🔍  Step 2 — Querying (every question)</a:t>
+            </a:r>
+          </a:p>
+          <a:p>
+            <a:pPr>
+              <a:spcAft>
+                <a:spcPts val="300"/>
+              </a:spcAft>
+              <a:defRPr sz="1300">
+                <a:solidFill>
+                  <a:srgbClr val="64748B"/>
+                </a:solidFill>
+                <a:latin typeface="Calibri"/>
+              </a:defRPr>
+            </a:pPr>
+            <a:r>
+              <a:t>Embed the user's question the same way</a:t>
+            </a:r>
+          </a:p>
+          <a:p>
+            <a:pPr>
+              <a:spcAft>
+                <a:spcPts val="300"/>
+              </a:spcAft>
+              <a:defRPr sz="1300">
+                <a:solidFill>
+                  <a:srgbClr val="64748B"/>
+                </a:solidFill>
+                <a:latin typeface="Calibri"/>
+              </a:defRPr>
+            </a:pPr>
+            <a:r>
+              <a:t>Find the top-k most similar chunks (semantic search)</a:t>
+            </a:r>
+          </a:p>
+          <a:p>
+            <a:pPr>
+              <a:spcAft>
+                <a:spcPts val="300"/>
+              </a:spcAft>
+              <a:defRPr sz="1300">
+                <a:solidFill>
+                  <a:srgbClr val="64748B"/>
+                </a:solidFill>
+                <a:latin typeface="Calibri"/>
+              </a:defRPr>
+            </a:pPr>
+            <a:r>
+              <a:t>Add them to the prompt → LLM answers from that context</a:t>
             </a:r>
           </a:p>
         </p:txBody>
@@ -3772,7 +4038,7 @@
         </p:nvSpPr>
         <p:spPr>
           <a:xfrm>
-            <a:off x="11247120" y="6400800"/>
+            <a:off x="11338560" y="6492240"/>
             <a:ext cx="731520" cy="274320"/>
           </a:xfrm>
           <a:prstGeom prst="rect">
@@ -3791,7 +4057,7 @@
                 <a:solidFill>
                   <a:srgbClr val="64748B"/>
                 </a:solidFill>
-                <a:latin typeface="Calibri" panose="020F0502020204030204"/>
+                <a:latin typeface="Calibri"/>
               </a:defRPr>
             </a:pPr>
             <a:r>
@@ -3809,7 +4075,7 @@
 </file>
 
 <file path=ppt/slides/slide2.xml><?xml version="1.0" encoding="utf-8"?>
-<p:sld xmlns:a="http://schemas.openxmlformats.org/drawingml/2006/main" xmlns:r="http://schemas.openxmlformats.org/officeDocument/2006/relationships" xmlns:p="http://schemas.openxmlformats.org/presentationml/2006/main">
+<p:sld xmlns:a="http://schemas.openxmlformats.org/drawingml/2006/main" xmlns:p="http://schemas.openxmlformats.org/presentationml/2006/main" xmlns:r="http://schemas.openxmlformats.org/officeDocument/2006/relationships">
   <p:cSld>
     <p:bg>
       <p:bgPr>
@@ -3877,8 +4143,8 @@
         </p:nvSpPr>
         <p:spPr>
           <a:xfrm>
-            <a:off x="731520" y="457200"/>
-            <a:ext cx="7315200" cy="457200"/>
+            <a:off x="731520" y="320040"/>
+            <a:ext cx="10698480" cy="502920"/>
           </a:xfrm>
           <a:prstGeom prst="rect">
             <a:avLst/>
@@ -3892,15 +4158,15 @@
           <a:lstStyle/>
           <a:p>
             <a:pPr algn="l">
-              <a:defRPr sz="3600" b="1">
+              <a:defRPr sz="3200" b="1">
                 <a:solidFill>
                   <a:srgbClr val="0F172A"/>
                 </a:solidFill>
-                <a:latin typeface="Calibri" panose="020F0502020204030204"/>
+                <a:latin typeface="Calibri"/>
               </a:defRPr>
             </a:pPr>
             <a:r>
-              <a:t>Why RAG?</a:t>
+              <a:t>RAG vs. Pasting Your Data Into the Prompt</a:t>
             </a:r>
           </a:p>
         </p:txBody>
@@ -3913,8 +4179,8 @@
         </p:nvSpPr>
         <p:spPr>
           <a:xfrm>
-            <a:off x="731520" y="914400"/>
-            <a:ext cx="10058400" cy="457200"/>
+            <a:off x="731520" y="868680"/>
+            <a:ext cx="10698480" cy="457200"/>
           </a:xfrm>
           <a:prstGeom prst="rect">
             <a:avLst/>
@@ -3928,15 +4194,15 @@
           <a:lstStyle/>
           <a:p>
             <a:pPr algn="l">
-              <a:defRPr sz="1800" b="0">
+              <a:defRPr sz="1600" b="0">
                 <a:solidFill>
                   <a:srgbClr val="64748B"/>
                 </a:solidFill>
-                <a:latin typeface="Calibri" panose="020F0502020204030204"/>
+                <a:latin typeface="Calibri"/>
               </a:defRPr>
             </a:pPr>
             <a:r>
-              <a:t>Three big problems that RAG solves — and what happens without it.</a:t>
+              <a:t>Today the project hands the model its context as a whole JSON file or README.md in the prompt. That works — until the data grows.</a:t>
             </a:r>
           </a:p>
         </p:txBody>
@@ -3949,449 +4215,8 @@
         </p:nvSpPr>
         <p:spPr>
           <a:xfrm>
-            <a:off x="731520" y="1463040"/>
-            <a:ext cx="3383280" cy="2377440"/>
-          </a:xfrm>
-          <a:prstGeom prst="roundRect">
-            <a:avLst/>
-          </a:prstGeom>
-          <a:solidFill>
-            <a:srgbClr val="F8FAFC"/>
-          </a:solidFill>
-          <a:ln w="12700">
-            <a:solidFill>
-              <a:srgbClr val="E2E8F0"/>
-            </a:solidFill>
-          </a:ln>
-        </p:spPr>
-        <p:style>
-          <a:lnRef idx="1">
-            <a:schemeClr val="accent1"/>
-          </a:lnRef>
-          <a:fillRef idx="3">
-            <a:schemeClr val="accent1"/>
-          </a:fillRef>
-          <a:effectRef idx="2">
-            <a:schemeClr val="accent1"/>
-          </a:effectRef>
-          <a:fontRef idx="minor">
-            <a:schemeClr val="lt1"/>
-          </a:fontRef>
-        </p:style>
-        <p:txBody>
-          <a:bodyPr wrap="square" lIns="137160" tIns="91440" bIns="91440" rtlCol="0" anchor="ctr"/>
-          <a:lstStyle/>
-          <a:p>
-            <a:pPr algn="ctr">
-              <a:spcAft>
-                <a:spcPts val="800"/>
-              </a:spcAft>
-              <a:defRPr sz="1800" b="1">
-                <a:solidFill>
-                  <a:srgbClr val="0F172A"/>
-                </a:solidFill>
-                <a:latin typeface="Calibri" panose="020F0502020204030204"/>
-              </a:defRPr>
-            </a:pPr>
-            <a:r>
-              <a:t>🚫  No Hallucination</a:t>
-            </a:r>
-          </a:p>
-          <a:p>
-            <a:pPr>
-              <a:spcAft>
-                <a:spcPts val="400"/>
-              </a:spcAft>
-              <a:defRPr sz="1400">
-                <a:solidFill>
-                  <a:srgbClr val="64748B"/>
-                </a:solidFill>
-                <a:latin typeface="Calibri" panose="020F0502020204030204"/>
-              </a:defRPr>
-            </a:pPr>
-            <a:r>
-              <a:t>AI is forced to answer only from</a:t>
-            </a:r>
-          </a:p>
-          <a:p>
-            <a:pPr>
-              <a:spcAft>
-                <a:spcPts val="400"/>
-              </a:spcAft>
-              <a:defRPr sz="1400">
-                <a:solidFill>
-                  <a:srgbClr val="64748B"/>
-                </a:solidFill>
-                <a:latin typeface="Calibri" panose="020F0502020204030204"/>
-              </a:defRPr>
-            </a:pPr>
-            <a:r>
-              <a:t>retrieved documents.</a:t>
-            </a:r>
-          </a:p>
-          <a:p>
-            <a:pPr>
-              <a:spcAft>
-                <a:spcPts val="400"/>
-              </a:spcAft>
-              <a:defRPr sz="1400">
-                <a:solidFill>
-                  <a:srgbClr val="64748B"/>
-                </a:solidFill>
-                <a:latin typeface="Calibri" panose="020F0502020204030204"/>
-              </a:defRPr>
-            </a:pPr>
-          </a:p>
-          <a:p>
-            <a:pPr>
-              <a:spcAft>
-                <a:spcPts val="400"/>
-              </a:spcAft>
-              <a:defRPr sz="1400">
-                <a:solidFill>
-                  <a:srgbClr val="64748B"/>
-                </a:solidFill>
-                <a:latin typeface="Calibri" panose="020F0502020204030204"/>
-              </a:defRPr>
-            </a:pPr>
-            <a:r>
-              <a:t>Without RAG: AI might invent</a:t>
-            </a:r>
-          </a:p>
-          <a:p>
-            <a:pPr>
-              <a:spcAft>
-                <a:spcPts val="400"/>
-              </a:spcAft>
-              <a:defRPr sz="1400">
-                <a:solidFill>
-                  <a:srgbClr val="64748B"/>
-                </a:solidFill>
-                <a:latin typeface="Calibri" panose="020F0502020204030204"/>
-              </a:defRPr>
-            </a:pPr>
-            <a:r>
-              <a:t>fake exercises or wrong muscles.</a:t>
-            </a:r>
-          </a:p>
-        </p:txBody>
-      </p:sp>
-      <p:sp>
-        <p:nvSpPr>
-          <p:cNvPr id="6" name="Rounded Rectangle 5"/>
-          <p:cNvSpPr/>
-          <p:nvPr/>
-        </p:nvSpPr>
-        <p:spPr>
-          <a:xfrm>
-            <a:off x="4480559" y="1463040"/>
-            <a:ext cx="3383280" cy="2377440"/>
-          </a:xfrm>
-          <a:prstGeom prst="roundRect">
-            <a:avLst/>
-          </a:prstGeom>
-          <a:solidFill>
-            <a:srgbClr val="F8FAFC"/>
-          </a:solidFill>
-          <a:ln w="12700">
-            <a:solidFill>
-              <a:srgbClr val="E2E8F0"/>
-            </a:solidFill>
-          </a:ln>
-        </p:spPr>
-        <p:style>
-          <a:lnRef idx="1">
-            <a:schemeClr val="accent1"/>
-          </a:lnRef>
-          <a:fillRef idx="3">
-            <a:schemeClr val="accent1"/>
-          </a:fillRef>
-          <a:effectRef idx="2">
-            <a:schemeClr val="accent1"/>
-          </a:effectRef>
-          <a:fontRef idx="minor">
-            <a:schemeClr val="lt1"/>
-          </a:fontRef>
-        </p:style>
-        <p:txBody>
-          <a:bodyPr wrap="square" lIns="137160" tIns="91440" bIns="91440" rtlCol="0" anchor="ctr"/>
-          <a:lstStyle/>
-          <a:p>
-            <a:pPr algn="ctr">
-              <a:spcAft>
-                <a:spcPts val="800"/>
-              </a:spcAft>
-              <a:defRPr sz="1800" b="1">
-                <a:solidFill>
-                  <a:srgbClr val="0F172A"/>
-                </a:solidFill>
-                <a:latin typeface="Calibri" panose="020F0502020204030204"/>
-              </a:defRPr>
-            </a:pPr>
-            <a:r>
-              <a:t>🔄  Always Up-To-Date</a:t>
-            </a:r>
-          </a:p>
-          <a:p>
-            <a:pPr>
-              <a:spcAft>
-                <a:spcPts val="400"/>
-              </a:spcAft>
-              <a:defRPr sz="1400">
-                <a:solidFill>
-                  <a:srgbClr val="64748B"/>
-                </a:solidFill>
-                <a:latin typeface="Calibri" panose="020F0502020204030204"/>
-              </a:defRPr>
-            </a:pPr>
-            <a:r>
-              <a:t>Add a new exercise to your JSON</a:t>
-            </a:r>
-          </a:p>
-          <a:p>
-            <a:pPr>
-              <a:spcAft>
-                <a:spcPts val="400"/>
-              </a:spcAft>
-              <a:defRPr sz="1400">
-                <a:solidFill>
-                  <a:srgbClr val="64748B"/>
-                </a:solidFill>
-                <a:latin typeface="Calibri" panose="020F0502020204030204"/>
-              </a:defRPr>
-            </a:pPr>
-            <a:r>
-              <a:t>file → re-run vector embedding.</a:t>
-            </a:r>
-          </a:p>
-          <a:p>
-            <a:pPr>
-              <a:spcAft>
-                <a:spcPts val="400"/>
-              </a:spcAft>
-              <a:defRPr sz="1400">
-                <a:solidFill>
-                  <a:srgbClr val="64748B"/>
-                </a:solidFill>
-                <a:latin typeface="Calibri" panose="020F0502020204030204"/>
-              </a:defRPr>
-            </a:pPr>
-          </a:p>
-          <a:p>
-            <a:pPr>
-              <a:spcAft>
-                <a:spcPts val="400"/>
-              </a:spcAft>
-              <a:defRPr sz="1400">
-                <a:solidFill>
-                  <a:srgbClr val="64748B"/>
-                </a:solidFill>
-                <a:latin typeface="Calibri" panose="020F0502020204030204"/>
-              </a:defRPr>
-            </a:pPr>
-            <a:r>
-              <a:t>No retraining, no fine-tuning,</a:t>
-            </a:r>
-          </a:p>
-          <a:p>
-            <a:pPr>
-              <a:spcAft>
-                <a:spcPts val="400"/>
-              </a:spcAft>
-              <a:defRPr sz="1400">
-                <a:solidFill>
-                  <a:srgbClr val="64748B"/>
-                </a:solidFill>
-                <a:latin typeface="Calibri" panose="020F0502020204030204"/>
-              </a:defRPr>
-            </a:pPr>
-            <a:r>
-              <a:t>no model updates needed.</a:t>
-            </a:r>
-          </a:p>
-        </p:txBody>
-      </p:sp>
-      <p:sp>
-        <p:nvSpPr>
-          <p:cNvPr id="7" name="Rounded Rectangle 6"/>
-          <p:cNvSpPr/>
-          <p:nvPr/>
-        </p:nvSpPr>
-        <p:spPr>
-          <a:xfrm>
-            <a:off x="8229600" y="1463040"/>
-            <a:ext cx="3383280" cy="2377440"/>
-          </a:xfrm>
-          <a:prstGeom prst="roundRect">
-            <a:avLst/>
-          </a:prstGeom>
-          <a:solidFill>
-            <a:srgbClr val="F8FAFC"/>
-          </a:solidFill>
-          <a:ln w="12700">
-            <a:solidFill>
-              <a:srgbClr val="E2E8F0"/>
-            </a:solidFill>
-          </a:ln>
-        </p:spPr>
-        <p:style>
-          <a:lnRef idx="1">
-            <a:schemeClr val="accent1"/>
-          </a:lnRef>
-          <a:fillRef idx="3">
-            <a:schemeClr val="accent1"/>
-          </a:fillRef>
-          <a:effectRef idx="2">
-            <a:schemeClr val="accent1"/>
-          </a:effectRef>
-          <a:fontRef idx="minor">
-            <a:schemeClr val="lt1"/>
-          </a:fontRef>
-        </p:style>
-        <p:txBody>
-          <a:bodyPr wrap="square" lIns="137160" tIns="91440" bIns="91440" rtlCol="0" anchor="ctr"/>
-          <a:lstStyle/>
-          <a:p>
-            <a:pPr algn="ctr">
-              <a:spcAft>
-                <a:spcPts val="800"/>
-              </a:spcAft>
-              <a:defRPr sz="1800" b="1">
-                <a:solidFill>
-                  <a:srgbClr val="0F172A"/>
-                </a:solidFill>
-                <a:latin typeface="Calibri" panose="020F0502020204030204"/>
-              </a:defRPr>
-            </a:pPr>
-            <a:r>
-              <a:t>🧠  Understands Meaning</a:t>
-            </a:r>
-          </a:p>
-          <a:p>
-            <a:pPr>
-              <a:spcAft>
-                <a:spcPts val="400"/>
-              </a:spcAft>
-              <a:defRPr sz="1400">
-                <a:solidFill>
-                  <a:srgbClr val="64748B"/>
-                </a:solidFill>
-                <a:latin typeface="Calibri" panose="020F0502020204030204"/>
-              </a:defRPr>
-            </a:pPr>
-            <a:r>
-              <a:t>"calf" matches "Calves", "heel raise",</a:t>
-            </a:r>
-          </a:p>
-          <a:p>
-            <a:pPr>
-              <a:spcAft>
-                <a:spcPts val="400"/>
-              </a:spcAft>
-              <a:defRPr sz="1400">
-                <a:solidFill>
-                  <a:srgbClr val="64748B"/>
-                </a:solidFill>
-                <a:latin typeface="Calibri" panose="020F0502020204030204"/>
-              </a:defRPr>
-            </a:pPr>
-            <a:r>
-              <a:t>"gastrocnemius", "lower leg".</a:t>
-            </a:r>
-          </a:p>
-          <a:p>
-            <a:pPr>
-              <a:spcAft>
-                <a:spcPts val="400"/>
-              </a:spcAft>
-              <a:defRPr sz="1400">
-                <a:solidFill>
-                  <a:srgbClr val="64748B"/>
-                </a:solidFill>
-                <a:latin typeface="Calibri" panose="020F0502020204030204"/>
-              </a:defRPr>
-            </a:pPr>
-          </a:p>
-          <a:p>
-            <a:pPr>
-              <a:spcAft>
-                <a:spcPts val="400"/>
-              </a:spcAft>
-              <a:defRPr sz="1400">
-                <a:solidFill>
-                  <a:srgbClr val="64748B"/>
-                </a:solidFill>
-                <a:latin typeface="Calibri" panose="020F0502020204030204"/>
-              </a:defRPr>
-            </a:pPr>
-            <a:r>
-              <a:t>Keyword search would fail.</a:t>
-            </a:r>
-          </a:p>
-          <a:p>
-            <a:pPr>
-              <a:spcAft>
-                <a:spcPts val="400"/>
-              </a:spcAft>
-              <a:defRPr sz="1400">
-                <a:solidFill>
-                  <a:srgbClr val="64748B"/>
-                </a:solidFill>
-                <a:latin typeface="Calibri" panose="020F0502020204030204"/>
-              </a:defRPr>
-            </a:pPr>
-            <a:r>
-              <a:t>Semantic search understands intent.</a:t>
-            </a:r>
-          </a:p>
-        </p:txBody>
-      </p:sp>
-      <p:sp>
-        <p:nvSpPr>
-          <p:cNvPr id="8" name="TextBox 7"/>
-          <p:cNvSpPr txBox="1"/>
-          <p:nvPr/>
-        </p:nvSpPr>
-        <p:spPr>
-          <a:xfrm>
-            <a:off x="731520" y="4114800"/>
-            <a:ext cx="4572000" cy="365760"/>
-          </a:xfrm>
-          <a:prstGeom prst="rect">
-            <a:avLst/>
-          </a:prstGeom>
-          <a:noFill/>
-        </p:spPr>
-        <p:txBody>
-          <a:bodyPr wrap="square">
-            <a:spAutoFit/>
-          </a:bodyPr>
-          <a:lstStyle/>
-          <a:p>
-            <a:pPr algn="l">
-              <a:defRPr sz="2000" b="1">
-                <a:solidFill>
-                  <a:srgbClr val="0F172A"/>
-                </a:solidFill>
-                <a:latin typeface="Calibri" panose="020F0502020204030204"/>
-              </a:defRPr>
-            </a:pPr>
-            <a:r>
-              <a:t>Before &amp; After RAG</a:t>
-            </a:r>
-          </a:p>
-        </p:txBody>
-      </p:sp>
-      <p:sp>
-        <p:nvSpPr>
-          <p:cNvPr id="9" name="Rounded Rectangle 8"/>
-          <p:cNvSpPr/>
-          <p:nvPr/>
-        </p:nvSpPr>
-        <p:spPr>
-          <a:xfrm>
-            <a:off x="731520" y="4572000"/>
-            <a:ext cx="5212080" cy="1828800"/>
+            <a:off x="731520" y="1417320"/>
+            <a:ext cx="5212080" cy="3063240"/>
           </a:xfrm>
           <a:prstGeom prst="roundRect">
             <a:avLst/>
@@ -4420,83 +4245,33 @@
           </a:fontRef>
         </p:style>
         <p:txBody>
-          <a:bodyPr wrap="square" rtlCol="0" anchor="ctr"/>
+          <a:bodyPr rtlCol="0" anchor="ctr" wrap="square"/>
           <a:lstStyle/>
           <a:p>
             <a:pPr algn="l">
-              <a:defRPr sz="1700" b="1">
+              <a:defRPr sz="1600" b="1">
                 <a:solidFill>
                   <a:srgbClr val="DC2626"/>
                 </a:solidFill>
-                <a:latin typeface="Calibri" panose="020F0502020204030204"/>
+                <a:latin typeface="Calibri"/>
               </a:defRPr>
             </a:pPr>
             <a:r>
-              <a:t>❌  Without RAG (LLM-only)</a:t>
-            </a:r>
-          </a:p>
-          <a:p>
-            <a:pPr algn="l">
-              <a:defRPr sz="1700" b="1">
-                <a:solidFill>
-                  <a:srgbClr val="DC2626"/>
-                </a:solidFill>
-                <a:latin typeface="Calibri" panose="020F0502020204030204"/>
-              </a:defRPr>
-            </a:pPr>
-          </a:p>
-          <a:p>
-            <a:pPr algn="l">
-              <a:defRPr sz="1700" b="1">
-                <a:solidFill>
-                  <a:srgbClr val="DC2626"/>
-                </a:solidFill>
-                <a:latin typeface="Calibri" panose="020F0502020204030204"/>
-              </a:defRPr>
-            </a:pPr>
-          </a:p>
-          <a:p>
-            <a:pPr algn="l">
-              <a:defRPr sz="1700" b="1">
-                <a:solidFill>
-                  <a:srgbClr val="DC2626"/>
-                </a:solidFill>
-                <a:latin typeface="Calibri" panose="020F0502020204030204"/>
-              </a:defRPr>
-            </a:pPr>
-          </a:p>
-          <a:p>
-            <a:pPr algn="l">
-              <a:defRPr sz="1700" b="1">
-                <a:solidFill>
-                  <a:srgbClr val="DC2626"/>
-                </a:solidFill>
-                <a:latin typeface="Calibri" panose="020F0502020204030204"/>
-              </a:defRPr>
-            </a:pPr>
-          </a:p>
-          <a:p>
-            <a:pPr algn="l">
-              <a:defRPr sz="1700" b="1">
-                <a:solidFill>
-                  <a:srgbClr val="DC2626"/>
-                </a:solidFill>
-                <a:latin typeface="Calibri" panose="020F0502020204030204"/>
-              </a:defRPr>
-            </a:pPr>
-          </a:p>
-        </p:txBody>
-      </p:sp>
-      <p:sp>
-        <p:nvSpPr>
-          <p:cNvPr id="10" name="TextBox 9"/>
+              <a:t>📄  Pasting the file in (JSON / README.md)</a:t>
+            </a:r>
+          </a:p>
+        </p:txBody>
+      </p:sp>
+      <p:sp>
+        <p:nvSpPr>
+          <p:cNvPr id="6" name="TextBox 5"/>
           <p:cNvSpPr txBox="1"/>
           <p:nvPr/>
         </p:nvSpPr>
         <p:spPr>
           <a:xfrm>
-            <a:off x="914400" y="5029200"/>
-            <a:ext cx="4846320" cy="1371600"/>
+            <a:off x="914400" y="1874519"/>
+            <a:ext cx="4846320" cy="2468880"/>
           </a:xfrm>
           <a:prstGeom prst="rect">
             <a:avLst/>
@@ -4510,41 +4285,57 @@
           <a:lstStyle/>
           <a:p>
             <a:pPr algn="l">
-              <a:defRPr sz="1400" b="0">
+              <a:defRPr sz="1300" b="0">
                 <a:solidFill>
                   <a:srgbClr val="0F172A"/>
                 </a:solidFill>
-                <a:latin typeface="Calibri" panose="020F0502020204030204"/>
+                <a:latin typeface="Calibri"/>
               </a:defRPr>
             </a:pPr>
             <a:r>
-              <a:t>• May invent exercises that don't exist</a:t>
+              <a:t>• The whole file is re-sent with every request — you pay for</a:t>
             </a:r>
             <a:br/>
             <a:r>
-              <a:t>• Might recommend wrong equipment</a:t>
+              <a:t>   every token, every single call</a:t>
             </a:r>
             <a:br/>
             <a:r>
-              <a:t>• Can't access new data without retraining</a:t>
+              <a:t>• Hits the context-window ceiling as the data grows</a:t>
             </a:r>
             <a:br/>
             <a:r>
-              <a:t>• No traceability — where did that answer come from?</a:t>
-            </a:r>
-          </a:p>
-        </p:txBody>
-      </p:sp>
-      <p:sp>
-        <p:nvSpPr>
-          <p:cNvPr id="11" name="Rounded Rectangle 10"/>
+              <a:t>• The model must find the needle in the haystack itself —</a:t>
+            </a:r>
+            <a:br/>
+            <a:r>
+              <a:t>   irrelevant content dilutes attention ('lost in the middle')</a:t>
+            </a:r>
+            <a:br/>
+            <a:r>
+              <a:t>• Finding relevant info relies on the model scanning raw text,</a:t>
+            </a:r>
+            <a:br/>
+            <a:r>
+              <a:t>   not on search built for the job</a:t>
+            </a:r>
+            <a:br/>
+            <a:r>
+              <a:t>• No record of which part of the file the answer came from</a:t>
+            </a:r>
+          </a:p>
+        </p:txBody>
+      </p:sp>
+      <p:sp>
+        <p:nvSpPr>
+          <p:cNvPr id="7" name="Rounded Rectangle 6"/>
           <p:cNvSpPr/>
           <p:nvPr/>
         </p:nvSpPr>
         <p:spPr>
           <a:xfrm>
-            <a:off x="6309360" y="4572000"/>
-            <a:ext cx="5212080" cy="1828800"/>
+            <a:off x="6309360" y="1417320"/>
+            <a:ext cx="5212080" cy="3063240"/>
           </a:xfrm>
           <a:prstGeom prst="roundRect">
             <a:avLst/>
@@ -4573,73 +4364,33 @@
           </a:fontRef>
         </p:style>
         <p:txBody>
-          <a:bodyPr wrap="square" rtlCol="0" anchor="ctr"/>
+          <a:bodyPr rtlCol="0" anchor="ctr" wrap="square"/>
           <a:lstStyle/>
           <a:p>
             <a:pPr algn="l">
-              <a:defRPr sz="1700" b="1">
+              <a:defRPr sz="1600" b="1">
                 <a:solidFill>
                   <a:srgbClr val="16A34A"/>
                 </a:solidFill>
-                <a:latin typeface="Calibri" panose="020F0502020204030204"/>
+                <a:latin typeface="Calibri"/>
               </a:defRPr>
             </a:pPr>
             <a:r>
-              <a:t>✅  With RAG (Ours)</a:t>
-            </a:r>
-          </a:p>
-          <a:p>
-            <a:pPr algn="l">
-              <a:defRPr sz="1700" b="1">
-                <a:solidFill>
-                  <a:srgbClr val="16A34A"/>
-                </a:solidFill>
-                <a:latin typeface="Calibri" panose="020F0502020204030204"/>
-              </a:defRPr>
-            </a:pPr>
-          </a:p>
-          <a:p>
-            <a:pPr algn="l">
-              <a:defRPr sz="1700" b="1">
-                <a:solidFill>
-                  <a:srgbClr val="16A34A"/>
-                </a:solidFill>
-                <a:latin typeface="Calibri" panose="020F0502020204030204"/>
-              </a:defRPr>
-            </a:pPr>
-          </a:p>
-          <a:p>
-            <a:pPr algn="l">
-              <a:defRPr sz="1700" b="1">
-                <a:solidFill>
-                  <a:srgbClr val="16A34A"/>
-                </a:solidFill>
-                <a:latin typeface="Calibri" panose="020F0502020204030204"/>
-              </a:defRPr>
-            </a:pPr>
-          </a:p>
-          <a:p>
-            <a:pPr algn="l">
-              <a:defRPr sz="1700" b="1">
-                <a:solidFill>
-                  <a:srgbClr val="16A34A"/>
-                </a:solidFill>
-                <a:latin typeface="Calibri" panose="020F0502020204030204"/>
-              </a:defRPr>
-            </a:pPr>
-          </a:p>
-        </p:txBody>
-      </p:sp>
-      <p:sp>
-        <p:nvSpPr>
-          <p:cNvPr id="12" name="TextBox 11"/>
+              <a:t>🔍  RAG (retrieve, then generate)</a:t>
+            </a:r>
+          </a:p>
+        </p:txBody>
+      </p:sp>
+      <p:sp>
+        <p:nvSpPr>
+          <p:cNvPr id="8" name="TextBox 7"/>
           <p:cNvSpPr txBox="1"/>
           <p:nvPr/>
         </p:nvSpPr>
         <p:spPr>
           <a:xfrm>
-            <a:off x="6400800" y="5029200"/>
-            <a:ext cx="4846320" cy="1371600"/>
+            <a:off x="6492240" y="1874519"/>
+            <a:ext cx="4846320" cy="2468880"/>
           </a:xfrm>
           <a:prstGeom prst="rect">
             <a:avLst/>
@@ -4653,40 +4404,183 @@
           <a:lstStyle/>
           <a:p>
             <a:pPr algn="l">
-              <a:defRPr sz="1400" b="0">
+              <a:defRPr sz="1300" b="0">
                 <a:solidFill>
                   <a:srgbClr val="0F172A"/>
                 </a:solidFill>
-                <a:latin typeface="Calibri" panose="020F0502020204030204"/>
+                <a:latin typeface="Calibri"/>
               </a:defRPr>
             </a:pPr>
             <a:r>
-              <a:t>• Answers grounded in real exercise data</a:t>
+              <a:t>• Only the top few relevant chunks are sent — prompts stay</a:t>
             </a:r>
             <a:br/>
             <a:r>
-              <a:t>• Correct equipment, muscles, body parts</a:t>
+              <a:t>   small, cheap and fast no matter how big the dataset gets</a:t>
             </a:r>
             <a:br/>
             <a:r>
-              <a:t>• Add exercises anytime — no retraining</a:t>
+              <a:t>• Scales to thousands or millions of documents</a:t>
             </a:r>
             <a:br/>
             <a:r>
-              <a:t>• Every answer traceable to source documents</a:t>
-            </a:r>
-          </a:p>
-        </p:txBody>
-      </p:sp>
-      <p:sp>
-        <p:nvSpPr>
-          <p:cNvPr id="13" name="TextBox 12"/>
+              <a:t>• Focused context → sharper, better-grounded answers</a:t>
+            </a:r>
+            <a:br/>
+            <a:r>
+              <a:t>• Semantic search matches by meaning: 'calf' finds 'calves',</a:t>
+            </a:r>
+            <a:br/>
+            <a:r>
+              <a:t>   'heel raise', 'gastrocnemius' — keywords alone would miss it</a:t>
+            </a:r>
+            <a:br/>
+            <a:r>
+              <a:t>• Retrieved chunks double as citations — every answer is</a:t>
+            </a:r>
+            <a:br/>
+            <a:r>
+              <a:t>   traceable back to its source</a:t>
+            </a:r>
+          </a:p>
+        </p:txBody>
+      </p:sp>
+      <p:sp>
+        <p:nvSpPr>
+          <p:cNvPr id="9" name="Rounded Rectangle 8"/>
+          <p:cNvSpPr/>
+          <p:nvPr/>
+        </p:nvSpPr>
+        <p:spPr>
+          <a:xfrm>
+            <a:off x="731520" y="4709160"/>
+            <a:ext cx="10789920" cy="1600200"/>
+          </a:xfrm>
+          <a:prstGeom prst="roundRect">
+            <a:avLst/>
+          </a:prstGeom>
+          <a:solidFill>
+            <a:srgbClr val="FFF7ED"/>
+          </a:solidFill>
+          <a:ln w="12700">
+            <a:solidFill>
+              <a:srgbClr val="F57F17"/>
+            </a:solidFill>
+          </a:ln>
+        </p:spPr>
+        <p:style>
+          <a:lnRef idx="1">
+            <a:schemeClr val="accent1"/>
+          </a:lnRef>
+          <a:fillRef idx="3">
+            <a:schemeClr val="accent1"/>
+          </a:fillRef>
+          <a:effectRef idx="2">
+            <a:schemeClr val="accent1"/>
+          </a:effectRef>
+          <a:fontRef idx="minor">
+            <a:schemeClr val="lt1"/>
+          </a:fontRef>
+        </p:style>
+        <p:txBody>
+          <a:bodyPr rtlCol="0" anchor="ctr" wrap="square"/>
+          <a:lstStyle/>
+          <a:p>
+            <a:pPr algn="l">
+              <a:defRPr sz="1700" b="1">
+                <a:solidFill>
+                  <a:srgbClr val="0F172A"/>
+                </a:solidFill>
+                <a:latin typeface="Calibri"/>
+              </a:defRPr>
+            </a:pPr>
+            <a:r>
+              <a:t>⚖️  So when is pasting the file actually fine?</a:t>
+            </a:r>
+          </a:p>
+        </p:txBody>
+      </p:sp>
+      <p:sp>
+        <p:nvSpPr>
+          <p:cNvPr id="10" name="TextBox 9"/>
           <p:cNvSpPr txBox="1"/>
           <p:nvPr/>
         </p:nvSpPr>
         <p:spPr>
           <a:xfrm>
-            <a:off x="11247120" y="6400800"/>
+            <a:off x="914400" y="5120640"/>
+            <a:ext cx="10424160" cy="548640"/>
+          </a:xfrm>
+          <a:prstGeom prst="rect">
+            <a:avLst/>
+          </a:prstGeom>
+          <a:noFill/>
+        </p:spPr>
+        <p:txBody>
+          <a:bodyPr wrap="square">
+            <a:spAutoFit/>
+          </a:bodyPr>
+          <a:lstStyle/>
+          <a:p>
+            <a:pPr algn="l">
+              <a:defRPr sz="1400" b="0">
+                <a:solidFill>
+                  <a:srgbClr val="0F172A"/>
+                </a:solidFill>
+                <a:latin typeface="Calibri"/>
+              </a:defRPr>
+            </a:pPr>
+            <a:r>
+              <a:t>If the data is small, stable and comfortably fits in the prompt, stuffing it in is simpler — and perfectly reasonable. RAG pays off once the data is large, keeps growing, or you care about token cost, answer quality and traceability.</a:t>
+            </a:r>
+          </a:p>
+        </p:txBody>
+      </p:sp>
+      <p:sp>
+        <p:nvSpPr>
+          <p:cNvPr id="11" name="TextBox 10"/>
+          <p:cNvSpPr txBox="1"/>
+          <p:nvPr/>
+        </p:nvSpPr>
+        <p:spPr>
+          <a:xfrm>
+            <a:off x="914400" y="5760720"/>
+            <a:ext cx="10424160" cy="411480"/>
+          </a:xfrm>
+          <a:prstGeom prst="rect">
+            <a:avLst/>
+          </a:prstGeom>
+          <a:noFill/>
+        </p:spPr>
+        <p:txBody>
+          <a:bodyPr wrap="square">
+            <a:spAutoFit/>
+          </a:bodyPr>
+          <a:lstStyle/>
+          <a:p>
+            <a:pPr algn="l">
+              <a:defRPr sz="1400" b="1">
+                <a:solidFill>
+                  <a:srgbClr val="0F172A"/>
+                </a:solidFill>
+                <a:latin typeface="Calibri"/>
+              </a:defRPr>
+            </a:pPr>
+            <a:r>
+              <a:t>💡  Rule of thumb: prompt-stuffing makes the model read everything; RAG lets it read only what matters.</a:t>
+            </a:r>
+          </a:p>
+        </p:txBody>
+      </p:sp>
+      <p:sp>
+        <p:nvSpPr>
+          <p:cNvPr id="12" name="TextBox 11"/>
+          <p:cNvSpPr txBox="1"/>
+          <p:nvPr/>
+        </p:nvSpPr>
+        <p:spPr>
+          <a:xfrm>
+            <a:off x="11338560" y="6492240"/>
             <a:ext cx="731520" cy="274320"/>
           </a:xfrm>
           <a:prstGeom prst="rect">
@@ -4705,7 +4599,7 @@
                 <a:solidFill>
                   <a:srgbClr val="64748B"/>
                 </a:solidFill>
-                <a:latin typeface="Calibri" panose="020F0502020204030204"/>
+                <a:latin typeface="Calibri"/>
               </a:defRPr>
             </a:pPr>
             <a:r>
@@ -5038,10 +4932,6 @@
       </a:style>
     </a:lnDef>
   </a:objectDefaults>
-  <a:extLst>
-    <a:ext uri="{05A4C25C-085E-4340-85A3-A5531E510DB2}">
-      <thm15:themeFamily xmlns:thm15="http://schemas.microsoft.com/office/thememl/2012/main" name="Office Theme" id="{62F939B6-93AF-4DB8-9C6B-D6C7DFDC589F}" vid="{4A3C46E8-61CC-4603-A589-7422A47A8E4A}"/>
-    </a:ext>
-  </a:extLst>
+  <a:extraClrSchemeLst/>
 </a:theme>
 </file>